--- a/testing/powerpoint.pptx
+++ b/testing/powerpoint.pptx
@@ -112,6 +112,3525 @@
 </p:presentation>
 </file>
 
+<file path=ppt/diagrams/colors1.xml><?xml version="1.0" encoding="utf-8"?>
+<dgm:colorsDef xmlns:dgm="http://schemas.openxmlformats.org/drawingml/2006/diagram" xmlns:a="http://schemas.openxmlformats.org/drawingml/2006/main" uniqueId="urn:microsoft.com/office/officeart/2005/8/colors/accent1_2">
+  <dgm:title val=""/>
+  <dgm:desc val=""/>
+  <dgm:catLst>
+    <dgm:cat type="accent1" pri="11200"/>
+  </dgm:catLst>
+  <dgm:styleLbl name="node0">
+    <dgm:fillClrLst meth="repeat">
+      <a:schemeClr val="accent1"/>
+    </dgm:fillClrLst>
+    <dgm:linClrLst meth="repeat">
+      <a:schemeClr val="lt1"/>
+    </dgm:linClrLst>
+    <dgm:effectClrLst/>
+    <dgm:txLinClrLst/>
+    <dgm:txFillClrLst/>
+    <dgm:txEffectClrLst/>
+  </dgm:styleLbl>
+  <dgm:styleLbl name="alignNode1">
+    <dgm:fillClrLst meth="repeat">
+      <a:schemeClr val="accent1"/>
+    </dgm:fillClrLst>
+    <dgm:linClrLst meth="repeat">
+      <a:schemeClr val="accent1"/>
+    </dgm:linClrLst>
+    <dgm:effectClrLst/>
+    <dgm:txLinClrLst/>
+    <dgm:txFillClrLst/>
+    <dgm:txEffectClrLst/>
+  </dgm:styleLbl>
+  <dgm:styleLbl name="node1">
+    <dgm:fillClrLst meth="repeat">
+      <a:schemeClr val="accent1"/>
+    </dgm:fillClrLst>
+    <dgm:linClrLst meth="repeat">
+      <a:schemeClr val="lt1"/>
+    </dgm:linClrLst>
+    <dgm:effectClrLst/>
+    <dgm:txLinClrLst/>
+    <dgm:txFillClrLst/>
+    <dgm:txEffectClrLst/>
+  </dgm:styleLbl>
+  <dgm:styleLbl name="lnNode1">
+    <dgm:fillClrLst meth="repeat">
+      <a:schemeClr val="accent1"/>
+    </dgm:fillClrLst>
+    <dgm:linClrLst meth="repeat">
+      <a:schemeClr val="lt1"/>
+    </dgm:linClrLst>
+    <dgm:effectClrLst/>
+    <dgm:txLinClrLst/>
+    <dgm:txFillClrLst/>
+    <dgm:txEffectClrLst/>
+  </dgm:styleLbl>
+  <dgm:styleLbl name="vennNode1">
+    <dgm:fillClrLst meth="repeat">
+      <a:schemeClr val="accent1">
+        <a:alpha val="50000"/>
+      </a:schemeClr>
+    </dgm:fillClrLst>
+    <dgm:linClrLst meth="repeat">
+      <a:schemeClr val="lt1"/>
+    </dgm:linClrLst>
+    <dgm:effectClrLst/>
+    <dgm:txLinClrLst/>
+    <dgm:txFillClrLst/>
+    <dgm:txEffectClrLst/>
+  </dgm:styleLbl>
+  <dgm:styleLbl name="node2">
+    <dgm:fillClrLst meth="repeat">
+      <a:schemeClr val="accent1"/>
+    </dgm:fillClrLst>
+    <dgm:linClrLst meth="repeat">
+      <a:schemeClr val="lt1"/>
+    </dgm:linClrLst>
+    <dgm:effectClrLst/>
+    <dgm:txLinClrLst/>
+    <dgm:txFillClrLst/>
+    <dgm:txEffectClrLst/>
+  </dgm:styleLbl>
+  <dgm:styleLbl name="node3">
+    <dgm:fillClrLst meth="repeat">
+      <a:schemeClr val="accent1"/>
+    </dgm:fillClrLst>
+    <dgm:linClrLst meth="repeat">
+      <a:schemeClr val="lt1"/>
+    </dgm:linClrLst>
+    <dgm:effectClrLst/>
+    <dgm:txLinClrLst/>
+    <dgm:txFillClrLst/>
+    <dgm:txEffectClrLst/>
+  </dgm:styleLbl>
+  <dgm:styleLbl name="node4">
+    <dgm:fillClrLst meth="repeat">
+      <a:schemeClr val="accent1"/>
+    </dgm:fillClrLst>
+    <dgm:linClrLst meth="repeat">
+      <a:schemeClr val="lt1"/>
+    </dgm:linClrLst>
+    <dgm:effectClrLst/>
+    <dgm:txLinClrLst/>
+    <dgm:txFillClrLst/>
+    <dgm:txEffectClrLst/>
+  </dgm:styleLbl>
+  <dgm:styleLbl name="fgImgPlace1">
+    <dgm:fillClrLst meth="repeat">
+      <a:schemeClr val="accent1">
+        <a:tint val="50000"/>
+      </a:schemeClr>
+    </dgm:fillClrLst>
+    <dgm:linClrLst meth="repeat">
+      <a:schemeClr val="lt1"/>
+    </dgm:linClrLst>
+    <dgm:effectClrLst/>
+    <dgm:txLinClrLst/>
+    <dgm:txFillClrLst meth="repeat">
+      <a:schemeClr val="lt1"/>
+    </dgm:txFillClrLst>
+    <dgm:txEffectClrLst/>
+  </dgm:styleLbl>
+  <dgm:styleLbl name="alignImgPlace1">
+    <dgm:fillClrLst meth="repeat">
+      <a:schemeClr val="accent1">
+        <a:tint val="50000"/>
+      </a:schemeClr>
+    </dgm:fillClrLst>
+    <dgm:linClrLst meth="repeat">
+      <a:schemeClr val="lt1"/>
+    </dgm:linClrLst>
+    <dgm:effectClrLst/>
+    <dgm:txLinClrLst/>
+    <dgm:txFillClrLst meth="repeat">
+      <a:schemeClr val="lt1"/>
+    </dgm:txFillClrLst>
+    <dgm:txEffectClrLst/>
+  </dgm:styleLbl>
+  <dgm:styleLbl name="bgImgPlace1">
+    <dgm:fillClrLst meth="repeat">
+      <a:schemeClr val="accent1">
+        <a:tint val="50000"/>
+      </a:schemeClr>
+    </dgm:fillClrLst>
+    <dgm:linClrLst meth="repeat">
+      <a:schemeClr val="lt1"/>
+    </dgm:linClrLst>
+    <dgm:effectClrLst/>
+    <dgm:txLinClrLst/>
+    <dgm:txFillClrLst meth="repeat">
+      <a:schemeClr val="lt1"/>
+    </dgm:txFillClrLst>
+    <dgm:txEffectClrLst/>
+  </dgm:styleLbl>
+  <dgm:styleLbl name="sibTrans2D1">
+    <dgm:fillClrLst meth="repeat">
+      <a:schemeClr val="accent1">
+        <a:tint val="60000"/>
+      </a:schemeClr>
+    </dgm:fillClrLst>
+    <dgm:linClrLst meth="repeat">
+      <a:schemeClr val="accent1">
+        <a:tint val="60000"/>
+      </a:schemeClr>
+    </dgm:linClrLst>
+    <dgm:effectClrLst/>
+    <dgm:txLinClrLst/>
+    <dgm:txFillClrLst/>
+    <dgm:txEffectClrLst/>
+  </dgm:styleLbl>
+  <dgm:styleLbl name="fgSibTrans2D1">
+    <dgm:fillClrLst meth="repeat">
+      <a:schemeClr val="accent1">
+        <a:tint val="60000"/>
+      </a:schemeClr>
+    </dgm:fillClrLst>
+    <dgm:linClrLst meth="repeat">
+      <a:schemeClr val="accent1">
+        <a:tint val="60000"/>
+      </a:schemeClr>
+    </dgm:linClrLst>
+    <dgm:effectClrLst/>
+    <dgm:txLinClrLst/>
+    <dgm:txFillClrLst/>
+    <dgm:txEffectClrLst/>
+  </dgm:styleLbl>
+  <dgm:styleLbl name="bgSibTrans2D1">
+    <dgm:fillClrLst meth="repeat">
+      <a:schemeClr val="accent1">
+        <a:tint val="60000"/>
+      </a:schemeClr>
+    </dgm:fillClrLst>
+    <dgm:linClrLst meth="repeat">
+      <a:schemeClr val="accent1">
+        <a:tint val="60000"/>
+      </a:schemeClr>
+    </dgm:linClrLst>
+    <dgm:effectClrLst/>
+    <dgm:txLinClrLst/>
+    <dgm:txFillClrLst/>
+    <dgm:txEffectClrLst/>
+  </dgm:styleLbl>
+  <dgm:styleLbl name="sibTrans1D1">
+    <dgm:fillClrLst meth="repeat">
+      <a:schemeClr val="accent1"/>
+    </dgm:fillClrLst>
+    <dgm:linClrLst meth="repeat">
+      <a:schemeClr val="accent1"/>
+    </dgm:linClrLst>
+    <dgm:effectClrLst/>
+    <dgm:txLinClrLst/>
+    <dgm:txFillClrLst meth="repeat">
+      <a:schemeClr val="tx1"/>
+    </dgm:txFillClrLst>
+    <dgm:txEffectClrLst/>
+  </dgm:styleLbl>
+  <dgm:styleLbl name="callout">
+    <dgm:fillClrLst meth="repeat">
+      <a:schemeClr val="accent1"/>
+    </dgm:fillClrLst>
+    <dgm:linClrLst meth="repeat">
+      <a:schemeClr val="accent1">
+        <a:tint val="50000"/>
+      </a:schemeClr>
+    </dgm:linClrLst>
+    <dgm:effectClrLst/>
+    <dgm:txLinClrLst/>
+    <dgm:txFillClrLst meth="repeat">
+      <a:schemeClr val="tx1"/>
+    </dgm:txFillClrLst>
+    <dgm:txEffectClrLst/>
+  </dgm:styleLbl>
+  <dgm:styleLbl name="asst0">
+    <dgm:fillClrLst meth="repeat">
+      <a:schemeClr val="accent1"/>
+    </dgm:fillClrLst>
+    <dgm:linClrLst meth="repeat">
+      <a:schemeClr val="lt1"/>
+    </dgm:linClrLst>
+    <dgm:effectClrLst/>
+    <dgm:txLinClrLst/>
+    <dgm:txFillClrLst/>
+    <dgm:txEffectClrLst/>
+  </dgm:styleLbl>
+  <dgm:styleLbl name="asst1">
+    <dgm:fillClrLst meth="repeat">
+      <a:schemeClr val="accent1"/>
+    </dgm:fillClrLst>
+    <dgm:linClrLst meth="repeat">
+      <a:schemeClr val="lt1"/>
+    </dgm:linClrLst>
+    <dgm:effectClrLst/>
+    <dgm:txLinClrLst/>
+    <dgm:txFillClrLst/>
+    <dgm:txEffectClrLst/>
+  </dgm:styleLbl>
+  <dgm:styleLbl name="asst2">
+    <dgm:fillClrLst meth="repeat">
+      <a:schemeClr val="accent1"/>
+    </dgm:fillClrLst>
+    <dgm:linClrLst meth="repeat">
+      <a:schemeClr val="lt1"/>
+    </dgm:linClrLst>
+    <dgm:effectClrLst/>
+    <dgm:txLinClrLst/>
+    <dgm:txFillClrLst/>
+    <dgm:txEffectClrLst/>
+  </dgm:styleLbl>
+  <dgm:styleLbl name="asst3">
+    <dgm:fillClrLst meth="repeat">
+      <a:schemeClr val="accent1"/>
+    </dgm:fillClrLst>
+    <dgm:linClrLst meth="repeat">
+      <a:schemeClr val="lt1"/>
+    </dgm:linClrLst>
+    <dgm:effectClrLst/>
+    <dgm:txLinClrLst/>
+    <dgm:txFillClrLst/>
+    <dgm:txEffectClrLst/>
+  </dgm:styleLbl>
+  <dgm:styleLbl name="asst4">
+    <dgm:fillClrLst meth="repeat">
+      <a:schemeClr val="accent1"/>
+    </dgm:fillClrLst>
+    <dgm:linClrLst meth="repeat">
+      <a:schemeClr val="lt1"/>
+    </dgm:linClrLst>
+    <dgm:effectClrLst/>
+    <dgm:txLinClrLst/>
+    <dgm:txFillClrLst/>
+    <dgm:txEffectClrLst/>
+  </dgm:styleLbl>
+  <dgm:styleLbl name="parChTrans2D1">
+    <dgm:fillClrLst meth="repeat">
+      <a:schemeClr val="accent1">
+        <a:tint val="60000"/>
+      </a:schemeClr>
+    </dgm:fillClrLst>
+    <dgm:linClrLst meth="repeat">
+      <a:schemeClr val="accent1">
+        <a:tint val="60000"/>
+      </a:schemeClr>
+    </dgm:linClrLst>
+    <dgm:effectClrLst/>
+    <dgm:txLinClrLst/>
+    <dgm:txFillClrLst meth="repeat">
+      <a:schemeClr val="lt1"/>
+    </dgm:txFillClrLst>
+    <dgm:txEffectClrLst/>
+  </dgm:styleLbl>
+  <dgm:styleLbl name="parChTrans2D2">
+    <dgm:fillClrLst meth="repeat">
+      <a:schemeClr val="accent1"/>
+    </dgm:fillClrLst>
+    <dgm:linClrLst meth="repeat">
+      <a:schemeClr val="accent1"/>
+    </dgm:linClrLst>
+    <dgm:effectClrLst/>
+    <dgm:txLinClrLst/>
+    <dgm:txFillClrLst meth="repeat">
+      <a:schemeClr val="lt1"/>
+    </dgm:txFillClrLst>
+    <dgm:txEffectClrLst/>
+  </dgm:styleLbl>
+  <dgm:styleLbl name="parChTrans2D3">
+    <dgm:fillClrLst meth="repeat">
+      <a:schemeClr val="accent1"/>
+    </dgm:fillClrLst>
+    <dgm:linClrLst meth="repeat">
+      <a:schemeClr val="accent1"/>
+    </dgm:linClrLst>
+    <dgm:effectClrLst/>
+    <dgm:txLinClrLst/>
+    <dgm:txFillClrLst meth="repeat">
+      <a:schemeClr val="lt1"/>
+    </dgm:txFillClrLst>
+    <dgm:txEffectClrLst/>
+  </dgm:styleLbl>
+  <dgm:styleLbl name="parChTrans2D4">
+    <dgm:fillClrLst meth="repeat">
+      <a:schemeClr val="accent1"/>
+    </dgm:fillClrLst>
+    <dgm:linClrLst meth="repeat">
+      <a:schemeClr val="accent1"/>
+    </dgm:linClrLst>
+    <dgm:effectClrLst/>
+    <dgm:txLinClrLst/>
+    <dgm:txFillClrLst meth="repeat">
+      <a:schemeClr val="lt1"/>
+    </dgm:txFillClrLst>
+    <dgm:txEffectClrLst/>
+  </dgm:styleLbl>
+  <dgm:styleLbl name="parChTrans1D1">
+    <dgm:fillClrLst meth="repeat">
+      <a:schemeClr val="accent1"/>
+    </dgm:fillClrLst>
+    <dgm:linClrLst meth="repeat">
+      <a:schemeClr val="accent1">
+        <a:shade val="60000"/>
+      </a:schemeClr>
+    </dgm:linClrLst>
+    <dgm:effectClrLst/>
+    <dgm:txLinClrLst/>
+    <dgm:txFillClrLst meth="repeat">
+      <a:schemeClr val="tx1"/>
+    </dgm:txFillClrLst>
+    <dgm:txEffectClrLst/>
+  </dgm:styleLbl>
+  <dgm:styleLbl name="parChTrans1D2">
+    <dgm:fillClrLst meth="repeat">
+      <a:schemeClr val="accent1"/>
+    </dgm:fillClrLst>
+    <dgm:linClrLst meth="repeat">
+      <a:schemeClr val="accent1">
+        <a:shade val="60000"/>
+      </a:schemeClr>
+    </dgm:linClrLst>
+    <dgm:effectClrLst/>
+    <dgm:txLinClrLst/>
+    <dgm:txFillClrLst meth="repeat">
+      <a:schemeClr val="tx1"/>
+    </dgm:txFillClrLst>
+    <dgm:txEffectClrLst/>
+  </dgm:styleLbl>
+  <dgm:styleLbl name="parChTrans1D3">
+    <dgm:fillClrLst meth="repeat">
+      <a:schemeClr val="accent1"/>
+    </dgm:fillClrLst>
+    <dgm:linClrLst meth="repeat">
+      <a:schemeClr val="accent1">
+        <a:shade val="80000"/>
+      </a:schemeClr>
+    </dgm:linClrLst>
+    <dgm:effectClrLst/>
+    <dgm:txLinClrLst/>
+    <dgm:txFillClrLst meth="repeat">
+      <a:schemeClr val="tx1"/>
+    </dgm:txFillClrLst>
+    <dgm:txEffectClrLst/>
+  </dgm:styleLbl>
+  <dgm:styleLbl name="parChTrans1D4">
+    <dgm:fillClrLst meth="repeat">
+      <a:schemeClr val="accent1"/>
+    </dgm:fillClrLst>
+    <dgm:linClrLst meth="repeat">
+      <a:schemeClr val="accent1">
+        <a:shade val="80000"/>
+      </a:schemeClr>
+    </dgm:linClrLst>
+    <dgm:effectClrLst/>
+    <dgm:txLinClrLst/>
+    <dgm:txFillClrLst meth="repeat">
+      <a:schemeClr val="tx1"/>
+    </dgm:txFillClrLst>
+    <dgm:txEffectClrLst/>
+  </dgm:styleLbl>
+  <dgm:styleLbl name="fgAcc1">
+    <dgm:fillClrLst meth="repeat">
+      <a:schemeClr val="lt1">
+        <a:alpha val="90000"/>
+      </a:schemeClr>
+    </dgm:fillClrLst>
+    <dgm:linClrLst meth="repeat">
+      <a:schemeClr val="accent1"/>
+    </dgm:linClrLst>
+    <dgm:effectClrLst/>
+    <dgm:txLinClrLst/>
+    <dgm:txFillClrLst meth="repeat">
+      <a:schemeClr val="dk1"/>
+    </dgm:txFillClrLst>
+    <dgm:txEffectClrLst/>
+  </dgm:styleLbl>
+  <dgm:styleLbl name="conFgAcc1">
+    <dgm:fillClrLst meth="repeat">
+      <a:schemeClr val="lt1">
+        <a:alpha val="90000"/>
+      </a:schemeClr>
+    </dgm:fillClrLst>
+    <dgm:linClrLst meth="repeat">
+      <a:schemeClr val="accent1"/>
+    </dgm:linClrLst>
+    <dgm:effectClrLst/>
+    <dgm:txLinClrLst/>
+    <dgm:txFillClrLst meth="repeat">
+      <a:schemeClr val="dk1"/>
+    </dgm:txFillClrLst>
+    <dgm:txEffectClrLst/>
+  </dgm:styleLbl>
+  <dgm:styleLbl name="alignAcc1">
+    <dgm:fillClrLst meth="repeat">
+      <a:schemeClr val="lt1">
+        <a:alpha val="90000"/>
+      </a:schemeClr>
+    </dgm:fillClrLst>
+    <dgm:linClrLst meth="repeat">
+      <a:schemeClr val="accent1"/>
+    </dgm:linClrLst>
+    <dgm:effectClrLst/>
+    <dgm:txLinClrLst/>
+    <dgm:txFillClrLst meth="repeat">
+      <a:schemeClr val="dk1"/>
+    </dgm:txFillClrLst>
+    <dgm:txEffectClrLst/>
+  </dgm:styleLbl>
+  <dgm:styleLbl name="trAlignAcc1">
+    <dgm:fillClrLst meth="repeat">
+      <a:schemeClr val="lt1">
+        <a:alpha val="40000"/>
+      </a:schemeClr>
+    </dgm:fillClrLst>
+    <dgm:linClrLst meth="repeat">
+      <a:schemeClr val="accent1"/>
+    </dgm:linClrLst>
+    <dgm:effectClrLst/>
+    <dgm:txLinClrLst/>
+    <dgm:txFillClrLst meth="repeat">
+      <a:schemeClr val="dk1"/>
+    </dgm:txFillClrLst>
+    <dgm:txEffectClrLst/>
+  </dgm:styleLbl>
+  <dgm:styleLbl name="bgAcc1">
+    <dgm:fillClrLst meth="repeat">
+      <a:schemeClr val="lt1">
+        <a:alpha val="90000"/>
+      </a:schemeClr>
+    </dgm:fillClrLst>
+    <dgm:linClrLst meth="repeat">
+      <a:schemeClr val="accent1"/>
+    </dgm:linClrLst>
+    <dgm:effectClrLst/>
+    <dgm:txLinClrLst/>
+    <dgm:txFillClrLst meth="repeat">
+      <a:schemeClr val="dk1"/>
+    </dgm:txFillClrLst>
+    <dgm:txEffectClrLst/>
+  </dgm:styleLbl>
+  <dgm:styleLbl name="solidFgAcc1">
+    <dgm:fillClrLst meth="repeat">
+      <a:schemeClr val="lt1"/>
+    </dgm:fillClrLst>
+    <dgm:linClrLst meth="repeat">
+      <a:schemeClr val="accent1"/>
+    </dgm:linClrLst>
+    <dgm:effectClrLst/>
+    <dgm:txLinClrLst/>
+    <dgm:txFillClrLst meth="repeat">
+      <a:schemeClr val="dk1"/>
+    </dgm:txFillClrLst>
+    <dgm:txEffectClrLst/>
+  </dgm:styleLbl>
+  <dgm:styleLbl name="solidAlignAcc1">
+    <dgm:fillClrLst meth="repeat">
+      <a:schemeClr val="lt1"/>
+    </dgm:fillClrLst>
+    <dgm:linClrLst meth="repeat">
+      <a:schemeClr val="accent1"/>
+    </dgm:linClrLst>
+    <dgm:effectClrLst/>
+    <dgm:txLinClrLst/>
+    <dgm:txFillClrLst meth="repeat">
+      <a:schemeClr val="dk1"/>
+    </dgm:txFillClrLst>
+    <dgm:txEffectClrLst/>
+  </dgm:styleLbl>
+  <dgm:styleLbl name="solidBgAcc1">
+    <dgm:fillClrLst meth="repeat">
+      <a:schemeClr val="lt1"/>
+    </dgm:fillClrLst>
+    <dgm:linClrLst meth="repeat">
+      <a:schemeClr val="accent1"/>
+    </dgm:linClrLst>
+    <dgm:effectClrLst/>
+    <dgm:txLinClrLst/>
+    <dgm:txFillClrLst meth="repeat">
+      <a:schemeClr val="dk1"/>
+    </dgm:txFillClrLst>
+    <dgm:txEffectClrLst/>
+  </dgm:styleLbl>
+  <dgm:styleLbl name="fgAccFollowNode1">
+    <dgm:fillClrLst meth="repeat">
+      <a:schemeClr val="accent1">
+        <a:alpha val="90000"/>
+        <a:tint val="40000"/>
+      </a:schemeClr>
+    </dgm:fillClrLst>
+    <dgm:linClrLst meth="repeat">
+      <a:schemeClr val="accent1">
+        <a:alpha val="90000"/>
+        <a:tint val="40000"/>
+      </a:schemeClr>
+    </dgm:linClrLst>
+    <dgm:effectClrLst/>
+    <dgm:txLinClrLst/>
+    <dgm:txFillClrLst meth="repeat">
+      <a:schemeClr val="dk1"/>
+    </dgm:txFillClrLst>
+    <dgm:txEffectClrLst/>
+  </dgm:styleLbl>
+  <dgm:styleLbl name="alignAccFollowNode1">
+    <dgm:fillClrLst meth="repeat">
+      <a:schemeClr val="accent1">
+        <a:alpha val="90000"/>
+        <a:tint val="40000"/>
+      </a:schemeClr>
+    </dgm:fillClrLst>
+    <dgm:linClrLst meth="repeat">
+      <a:schemeClr val="accent1">
+        <a:alpha val="90000"/>
+        <a:tint val="40000"/>
+      </a:schemeClr>
+    </dgm:linClrLst>
+    <dgm:effectClrLst/>
+    <dgm:txLinClrLst/>
+    <dgm:txFillClrLst meth="repeat">
+      <a:schemeClr val="dk1"/>
+    </dgm:txFillClrLst>
+    <dgm:txEffectClrLst/>
+  </dgm:styleLbl>
+  <dgm:styleLbl name="bgAccFollowNode1">
+    <dgm:fillClrLst meth="repeat">
+      <a:schemeClr val="accent1">
+        <a:alpha val="90000"/>
+        <a:tint val="40000"/>
+      </a:schemeClr>
+    </dgm:fillClrLst>
+    <dgm:linClrLst meth="repeat">
+      <a:schemeClr val="accent1">
+        <a:alpha val="90000"/>
+        <a:tint val="40000"/>
+      </a:schemeClr>
+    </dgm:linClrLst>
+    <dgm:effectClrLst/>
+    <dgm:txLinClrLst/>
+    <dgm:txFillClrLst meth="repeat">
+      <a:schemeClr val="dk1"/>
+    </dgm:txFillClrLst>
+    <dgm:txEffectClrLst/>
+  </dgm:styleLbl>
+  <dgm:styleLbl name="fgAcc0">
+    <dgm:fillClrLst meth="repeat">
+      <a:schemeClr val="lt1">
+        <a:alpha val="90000"/>
+      </a:schemeClr>
+    </dgm:fillClrLst>
+    <dgm:linClrLst meth="repeat">
+      <a:schemeClr val="accent1"/>
+    </dgm:linClrLst>
+    <dgm:effectClrLst/>
+    <dgm:txLinClrLst/>
+    <dgm:txFillClrLst meth="repeat">
+      <a:schemeClr val="dk1"/>
+    </dgm:txFillClrLst>
+    <dgm:txEffectClrLst/>
+  </dgm:styleLbl>
+  <dgm:styleLbl name="fgAcc2">
+    <dgm:fillClrLst meth="repeat">
+      <a:schemeClr val="lt1">
+        <a:alpha val="90000"/>
+      </a:schemeClr>
+    </dgm:fillClrLst>
+    <dgm:linClrLst meth="repeat">
+      <a:schemeClr val="accent1"/>
+    </dgm:linClrLst>
+    <dgm:effectClrLst/>
+    <dgm:txLinClrLst/>
+    <dgm:txFillClrLst meth="repeat">
+      <a:schemeClr val="dk1"/>
+    </dgm:txFillClrLst>
+    <dgm:txEffectClrLst/>
+  </dgm:styleLbl>
+  <dgm:styleLbl name="fgAcc3">
+    <dgm:fillClrLst meth="repeat">
+      <a:schemeClr val="lt1">
+        <a:alpha val="90000"/>
+      </a:schemeClr>
+    </dgm:fillClrLst>
+    <dgm:linClrLst meth="repeat">
+      <a:schemeClr val="accent1"/>
+    </dgm:linClrLst>
+    <dgm:effectClrLst/>
+    <dgm:txLinClrLst/>
+    <dgm:txFillClrLst meth="repeat">
+      <a:schemeClr val="dk1"/>
+    </dgm:txFillClrLst>
+    <dgm:txEffectClrLst/>
+  </dgm:styleLbl>
+  <dgm:styleLbl name="fgAcc4">
+    <dgm:fillClrLst meth="repeat">
+      <a:schemeClr val="lt1">
+        <a:alpha val="90000"/>
+      </a:schemeClr>
+    </dgm:fillClrLst>
+    <dgm:linClrLst meth="repeat">
+      <a:schemeClr val="accent1"/>
+    </dgm:linClrLst>
+    <dgm:effectClrLst/>
+    <dgm:txLinClrLst/>
+    <dgm:txFillClrLst meth="repeat">
+      <a:schemeClr val="dk1"/>
+    </dgm:txFillClrLst>
+    <dgm:txEffectClrLst/>
+  </dgm:styleLbl>
+  <dgm:styleLbl name="bgShp">
+    <dgm:fillClrLst meth="repeat">
+      <a:schemeClr val="accent1">
+        <a:tint val="40000"/>
+      </a:schemeClr>
+    </dgm:fillClrLst>
+    <dgm:linClrLst meth="repeat">
+      <a:schemeClr val="accent1"/>
+    </dgm:linClrLst>
+    <dgm:effectClrLst/>
+    <dgm:txLinClrLst/>
+    <dgm:txFillClrLst meth="repeat">
+      <a:schemeClr val="dk1"/>
+    </dgm:txFillClrLst>
+    <dgm:txEffectClrLst/>
+  </dgm:styleLbl>
+  <dgm:styleLbl name="dkBgShp">
+    <dgm:fillClrLst meth="repeat">
+      <a:schemeClr val="accent1">
+        <a:shade val="80000"/>
+      </a:schemeClr>
+    </dgm:fillClrLst>
+    <dgm:linClrLst meth="repeat">
+      <a:schemeClr val="accent1"/>
+    </dgm:linClrLst>
+    <dgm:effectClrLst/>
+    <dgm:txLinClrLst/>
+    <dgm:txFillClrLst meth="repeat">
+      <a:schemeClr val="lt1"/>
+    </dgm:txFillClrLst>
+    <dgm:txEffectClrLst/>
+  </dgm:styleLbl>
+  <dgm:styleLbl name="trBgShp">
+    <dgm:fillClrLst meth="repeat">
+      <a:schemeClr val="accent1">
+        <a:tint val="50000"/>
+        <a:alpha val="40000"/>
+      </a:schemeClr>
+    </dgm:fillClrLst>
+    <dgm:linClrLst meth="repeat">
+      <a:schemeClr val="accent1"/>
+    </dgm:linClrLst>
+    <dgm:effectClrLst/>
+    <dgm:txLinClrLst/>
+    <dgm:txFillClrLst meth="repeat">
+      <a:schemeClr val="lt1"/>
+    </dgm:txFillClrLst>
+    <dgm:txEffectClrLst/>
+  </dgm:styleLbl>
+  <dgm:styleLbl name="fgShp">
+    <dgm:fillClrLst meth="repeat">
+      <a:schemeClr val="accent1">
+        <a:tint val="60000"/>
+      </a:schemeClr>
+    </dgm:fillClrLst>
+    <dgm:linClrLst meth="repeat">
+      <a:schemeClr val="lt1"/>
+    </dgm:linClrLst>
+    <dgm:effectClrLst/>
+    <dgm:txLinClrLst/>
+    <dgm:txFillClrLst meth="repeat">
+      <a:schemeClr val="dk1"/>
+    </dgm:txFillClrLst>
+    <dgm:txEffectClrLst/>
+  </dgm:styleLbl>
+  <dgm:styleLbl name="revTx">
+    <dgm:fillClrLst meth="repeat">
+      <a:schemeClr val="lt1">
+        <a:alpha val="0"/>
+      </a:schemeClr>
+    </dgm:fillClrLst>
+    <dgm:linClrLst meth="repeat">
+      <a:schemeClr val="dk1">
+        <a:alpha val="0"/>
+      </a:schemeClr>
+    </dgm:linClrLst>
+    <dgm:effectClrLst/>
+    <dgm:txLinClrLst/>
+    <dgm:txFillClrLst meth="repeat">
+      <a:schemeClr val="tx1"/>
+    </dgm:txFillClrLst>
+    <dgm:txEffectClrLst/>
+  </dgm:styleLbl>
+</dgm:colorsDef>
+</file>
+
+<file path=ppt/diagrams/data1.xml><?xml version="1.0" encoding="utf-8"?>
+<dgm:dataModel xmlns:dgm="http://schemas.openxmlformats.org/drawingml/2006/diagram" xmlns:a="http://schemas.openxmlformats.org/drawingml/2006/main">
+  <dgm:ptLst>
+    <dgm:pt modelId="{204D8837-5DBB-491B-9046-2CF271795AB8}" type="doc">
+      <dgm:prSet loTypeId="urn:microsoft.com/office/officeart/2005/8/layout/architecture" loCatId="hierarchy" qsTypeId="urn:microsoft.com/office/officeart/2005/8/quickstyle/simple1" qsCatId="simple" csTypeId="urn:microsoft.com/office/officeart/2005/8/colors/accent1_2" csCatId="accent1" phldr="1"/>
+      <dgm:spPr/>
+      <dgm:t>
+        <a:bodyPr/>
+        <a:lstStyle/>
+        <a:p>
+          <a:endParaRPr lang="nl-NL"/>
+        </a:p>
+      </dgm:t>
+    </dgm:pt>
+    <dgm:pt modelId="{B503FE60-C767-4EED-AF9F-21DC13FB930E}">
+      <dgm:prSet phldrT="[Text]"/>
+      <dgm:spPr/>
+      <dgm:t>
+        <a:bodyPr/>
+        <a:lstStyle/>
+        <a:p>
+          <a:r>
+            <a:rPr lang="en-US" dirty="0"/>
+            <a:t>Serializable</a:t>
+          </a:r>
+          <a:endParaRPr lang="nl-NL" dirty="0"/>
+        </a:p>
+      </dgm:t>
+    </dgm:pt>
+    <dgm:pt modelId="{0C2D02E4-884F-416B-A78C-E0CD6BC7DD1E}" type="parTrans" cxnId="{DB8829A6-7DAD-4E73-A660-F7F6FF7C1634}">
+      <dgm:prSet/>
+      <dgm:spPr/>
+      <dgm:t>
+        <a:bodyPr/>
+        <a:lstStyle/>
+        <a:p>
+          <a:endParaRPr lang="nl-NL"/>
+        </a:p>
+      </dgm:t>
+    </dgm:pt>
+    <dgm:pt modelId="{6E235D28-082C-4386-B23D-687EAA5E1F4C}" type="sibTrans" cxnId="{DB8829A6-7DAD-4E73-A660-F7F6FF7C1634}">
+      <dgm:prSet/>
+      <dgm:spPr/>
+      <dgm:t>
+        <a:bodyPr/>
+        <a:lstStyle/>
+        <a:p>
+          <a:endParaRPr lang="nl-NL"/>
+        </a:p>
+      </dgm:t>
+    </dgm:pt>
+    <dgm:pt modelId="{910B80A7-D60E-40E2-A38C-066B00E9313A}">
+      <dgm:prSet phldrT="[Text]"/>
+      <dgm:spPr/>
+      <dgm:t>
+        <a:bodyPr/>
+        <a:lstStyle/>
+        <a:p>
+          <a:r>
+            <a:rPr lang="en-US" dirty="0"/>
+            <a:t>List -&gt; Vector, Point</a:t>
+          </a:r>
+          <a:endParaRPr lang="nl-NL" dirty="0"/>
+        </a:p>
+      </dgm:t>
+    </dgm:pt>
+    <dgm:pt modelId="{375E37A8-3933-41FB-AB35-B45C6C1D351B}" type="parTrans" cxnId="{7836C459-5FA8-439A-BB4C-1E3ECFC5C0FC}">
+      <dgm:prSet/>
+      <dgm:spPr/>
+      <dgm:t>
+        <a:bodyPr/>
+        <a:lstStyle/>
+        <a:p>
+          <a:endParaRPr lang="nl-NL"/>
+        </a:p>
+      </dgm:t>
+    </dgm:pt>
+    <dgm:pt modelId="{91D2A1FB-AFEE-42B6-B950-2601408A71F6}" type="sibTrans" cxnId="{7836C459-5FA8-439A-BB4C-1E3ECFC5C0FC}">
+      <dgm:prSet/>
+      <dgm:spPr/>
+      <dgm:t>
+        <a:bodyPr/>
+        <a:lstStyle/>
+        <a:p>
+          <a:endParaRPr lang="nl-NL"/>
+        </a:p>
+      </dgm:t>
+    </dgm:pt>
+    <dgm:pt modelId="{B66E7045-4EF4-45C9-95B4-7B8C74CFBBF1}">
+      <dgm:prSet phldrT="[Text]"/>
+      <dgm:spPr/>
+      <dgm:t>
+        <a:bodyPr/>
+        <a:lstStyle/>
+        <a:p>
+          <a:r>
+            <a:rPr lang="en-US" dirty="0"/>
+            <a:t>Vector[Vector]</a:t>
+          </a:r>
+          <a:endParaRPr lang="nl-NL" dirty="0"/>
+        </a:p>
+      </dgm:t>
+    </dgm:pt>
+    <dgm:pt modelId="{211B7288-AD6D-4101-8BBE-B8431CD53435}" type="parTrans" cxnId="{DB81BE8B-40FA-440E-AF4A-797EFB8905B3}">
+      <dgm:prSet/>
+      <dgm:spPr/>
+      <dgm:t>
+        <a:bodyPr/>
+        <a:lstStyle/>
+        <a:p>
+          <a:endParaRPr lang="nl-NL"/>
+        </a:p>
+      </dgm:t>
+    </dgm:pt>
+    <dgm:pt modelId="{C1091E2E-5C26-47B7-8ED9-66584A777A31}" type="sibTrans" cxnId="{DB81BE8B-40FA-440E-AF4A-797EFB8905B3}">
+      <dgm:prSet/>
+      <dgm:spPr/>
+      <dgm:t>
+        <a:bodyPr/>
+        <a:lstStyle/>
+        <a:p>
+          <a:endParaRPr lang="nl-NL"/>
+        </a:p>
+      </dgm:t>
+    </dgm:pt>
+    <dgm:pt modelId="{BC7EB86F-FC36-44FD-935D-ADEA7F2CB856}">
+      <dgm:prSet phldrT="[Text]"/>
+      <dgm:spPr/>
+      <dgm:t>
+        <a:bodyPr/>
+        <a:lstStyle/>
+        <a:p>
+          <a:r>
+            <a:rPr lang="en-US" dirty="0"/>
+            <a:t>Matrix</a:t>
+          </a:r>
+          <a:endParaRPr lang="nl-NL" dirty="0"/>
+        </a:p>
+      </dgm:t>
+    </dgm:pt>
+    <dgm:pt modelId="{C2299E9B-B791-4EE8-9788-F12F49DB6D93}" type="parTrans" cxnId="{7E23A762-0F7B-402A-87C7-3BDDB6179F5A}">
+      <dgm:prSet/>
+      <dgm:spPr/>
+      <dgm:t>
+        <a:bodyPr/>
+        <a:lstStyle/>
+        <a:p>
+          <a:endParaRPr lang="nl-NL"/>
+        </a:p>
+      </dgm:t>
+    </dgm:pt>
+    <dgm:pt modelId="{03037568-EA79-42EF-898C-69C0121D9C58}" type="sibTrans" cxnId="{7E23A762-0F7B-402A-87C7-3BDDB6179F5A}">
+      <dgm:prSet/>
+      <dgm:spPr/>
+      <dgm:t>
+        <a:bodyPr/>
+        <a:lstStyle/>
+        <a:p>
+          <a:endParaRPr lang="nl-NL"/>
+        </a:p>
+      </dgm:t>
+    </dgm:pt>
+    <dgm:pt modelId="{8EF8B73D-645D-4C24-A93F-9B0F3D85D0FD}">
+      <dgm:prSet phldrT="[Text]"/>
+      <dgm:spPr/>
+      <dgm:t>
+        <a:bodyPr/>
+        <a:lstStyle/>
+        <a:p>
+          <a:r>
+            <a:rPr lang="en-US" dirty="0"/>
+            <a:t>Line</a:t>
+          </a:r>
+          <a:endParaRPr lang="nl-NL" dirty="0"/>
+        </a:p>
+      </dgm:t>
+    </dgm:pt>
+    <dgm:pt modelId="{A24D958F-A5C7-4AC3-96A6-41EC10B17800}" type="parTrans" cxnId="{51D95AA0-3305-450B-B33E-654039353A15}">
+      <dgm:prSet/>
+      <dgm:spPr/>
+      <dgm:t>
+        <a:bodyPr/>
+        <a:lstStyle/>
+        <a:p>
+          <a:endParaRPr lang="nl-NL"/>
+        </a:p>
+      </dgm:t>
+    </dgm:pt>
+    <dgm:pt modelId="{9BBC81A9-183B-4A2B-AFFC-9DF7637F2F30}" type="sibTrans" cxnId="{51D95AA0-3305-450B-B33E-654039353A15}">
+      <dgm:prSet/>
+      <dgm:spPr/>
+      <dgm:t>
+        <a:bodyPr/>
+        <a:lstStyle/>
+        <a:p>
+          <a:endParaRPr lang="nl-NL"/>
+        </a:p>
+      </dgm:t>
+    </dgm:pt>
+    <dgm:pt modelId="{7007A174-3E88-47F4-A540-57D660B018A9}">
+      <dgm:prSet phldrT="[Text]"/>
+      <dgm:spPr/>
+      <dgm:t>
+        <a:bodyPr/>
+        <a:lstStyle/>
+        <a:p>
+          <a:r>
+            <a:rPr lang="en-US" dirty="0" err="1"/>
+            <a:t>PolyCurve</a:t>
+          </a:r>
+          <a:endParaRPr lang="nl-NL" dirty="0"/>
+        </a:p>
+      </dgm:t>
+    </dgm:pt>
+    <dgm:pt modelId="{2FC32CEC-191B-4454-891C-57ECC83DD555}" type="parTrans" cxnId="{65707B22-528A-4E4D-8D8F-2A1EA5EC7A6C}">
+      <dgm:prSet/>
+      <dgm:spPr/>
+      <dgm:t>
+        <a:bodyPr/>
+        <a:lstStyle/>
+        <a:p>
+          <a:endParaRPr lang="nl-NL"/>
+        </a:p>
+      </dgm:t>
+    </dgm:pt>
+    <dgm:pt modelId="{05B5E755-1EB1-4252-B66B-F5450184F94C}" type="sibTrans" cxnId="{65707B22-528A-4E4D-8D8F-2A1EA5EC7A6C}">
+      <dgm:prSet/>
+      <dgm:spPr/>
+      <dgm:t>
+        <a:bodyPr/>
+        <a:lstStyle/>
+        <a:p>
+          <a:endParaRPr lang="nl-NL"/>
+        </a:p>
+      </dgm:t>
+    </dgm:pt>
+    <dgm:pt modelId="{8A097B10-F045-46BB-B1B1-72B50EDA8108}">
+      <dgm:prSet phldrT="[Text]"/>
+      <dgm:spPr/>
+      <dgm:t>
+        <a:bodyPr/>
+        <a:lstStyle/>
+        <a:p>
+          <a:r>
+            <a:rPr lang="en-US" dirty="0"/>
+            <a:t>Polygon</a:t>
+          </a:r>
+          <a:endParaRPr lang="nl-NL" dirty="0"/>
+        </a:p>
+      </dgm:t>
+    </dgm:pt>
+    <dgm:pt modelId="{43B26ECC-B04B-4804-99FF-0D02A13DD40C}" type="parTrans" cxnId="{017CA2C4-F68F-40E5-B911-04F5AFFB7F13}">
+      <dgm:prSet/>
+      <dgm:spPr/>
+      <dgm:t>
+        <a:bodyPr/>
+        <a:lstStyle/>
+        <a:p>
+          <a:endParaRPr lang="nl-NL"/>
+        </a:p>
+      </dgm:t>
+    </dgm:pt>
+    <dgm:pt modelId="{22087AEE-0F2A-4B28-97BF-071F9669CEA4}" type="sibTrans" cxnId="{017CA2C4-F68F-40E5-B911-04F5AFFB7F13}">
+      <dgm:prSet/>
+      <dgm:spPr/>
+      <dgm:t>
+        <a:bodyPr/>
+        <a:lstStyle/>
+        <a:p>
+          <a:endParaRPr lang="nl-NL"/>
+        </a:p>
+      </dgm:t>
+    </dgm:pt>
+    <dgm:pt modelId="{EDFB4ED5-46D8-4D16-A24F-88765E9CE37B}">
+      <dgm:prSet phldrT="[Text]"/>
+      <dgm:spPr/>
+      <dgm:t>
+        <a:bodyPr/>
+        <a:lstStyle/>
+        <a:p>
+          <a:r>
+            <a:rPr lang="en-US" dirty="0"/>
+            <a:t>Color</a:t>
+          </a:r>
+          <a:endParaRPr lang="nl-NL" dirty="0"/>
+        </a:p>
+      </dgm:t>
+    </dgm:pt>
+    <dgm:pt modelId="{8DAC9960-8CD8-4345-B98C-6BF6F67D6410}" type="parTrans" cxnId="{5FA73787-A11E-4CE4-A44C-470065AD5B3A}">
+      <dgm:prSet/>
+      <dgm:spPr/>
+      <dgm:t>
+        <a:bodyPr/>
+        <a:lstStyle/>
+        <a:p>
+          <a:endParaRPr lang="nl-NL"/>
+        </a:p>
+      </dgm:t>
+    </dgm:pt>
+    <dgm:pt modelId="{D890968B-3136-4668-9D99-44948777C9A8}" type="sibTrans" cxnId="{5FA73787-A11E-4CE4-A44C-470065AD5B3A}">
+      <dgm:prSet/>
+      <dgm:spPr/>
+      <dgm:t>
+        <a:bodyPr/>
+        <a:lstStyle/>
+        <a:p>
+          <a:endParaRPr lang="nl-NL"/>
+        </a:p>
+      </dgm:t>
+    </dgm:pt>
+    <dgm:pt modelId="{5A1B9F10-695C-4E24-9BF0-6B92AEB5C6AD}" type="pres">
+      <dgm:prSet presAssocID="{204D8837-5DBB-491B-9046-2CF271795AB8}" presName="Name0" presStyleCnt="0">
+        <dgm:presLayoutVars>
+          <dgm:chPref val="1"/>
+          <dgm:dir/>
+          <dgm:animOne val="branch"/>
+          <dgm:animLvl val="lvl"/>
+          <dgm:resizeHandles/>
+        </dgm:presLayoutVars>
+      </dgm:prSet>
+      <dgm:spPr/>
+    </dgm:pt>
+    <dgm:pt modelId="{933F2FA4-7008-4E19-8E19-674AF36D74BA}" type="pres">
+      <dgm:prSet presAssocID="{B503FE60-C767-4EED-AF9F-21DC13FB930E}" presName="vertOne" presStyleCnt="0"/>
+      <dgm:spPr/>
+    </dgm:pt>
+    <dgm:pt modelId="{00C44FFE-121D-4A99-8F70-BF9FBB00EFBF}" type="pres">
+      <dgm:prSet presAssocID="{B503FE60-C767-4EED-AF9F-21DC13FB930E}" presName="txOne" presStyleLbl="node0" presStyleIdx="0" presStyleCnt="1">
+        <dgm:presLayoutVars>
+          <dgm:chPref val="3"/>
+        </dgm:presLayoutVars>
+      </dgm:prSet>
+      <dgm:spPr/>
+    </dgm:pt>
+    <dgm:pt modelId="{12E7773A-7335-49BF-A31C-D99581297130}" type="pres">
+      <dgm:prSet presAssocID="{B503FE60-C767-4EED-AF9F-21DC13FB930E}" presName="parTransOne" presStyleCnt="0"/>
+      <dgm:spPr/>
+    </dgm:pt>
+    <dgm:pt modelId="{8B1A5913-6392-43B8-B744-4025A4C5CA8C}" type="pres">
+      <dgm:prSet presAssocID="{B503FE60-C767-4EED-AF9F-21DC13FB930E}" presName="horzOne" presStyleCnt="0"/>
+      <dgm:spPr/>
+    </dgm:pt>
+    <dgm:pt modelId="{922D0556-6002-403C-9FC9-1C70A6D400AE}" type="pres">
+      <dgm:prSet presAssocID="{910B80A7-D60E-40E2-A38C-066B00E9313A}" presName="vertTwo" presStyleCnt="0"/>
+      <dgm:spPr/>
+    </dgm:pt>
+    <dgm:pt modelId="{F8CA7072-7D18-45BD-B732-FDE65178DFD2}" type="pres">
+      <dgm:prSet presAssocID="{910B80A7-D60E-40E2-A38C-066B00E9313A}" presName="txTwo" presStyleLbl="node2" presStyleIdx="0" presStyleCnt="1">
+        <dgm:presLayoutVars>
+          <dgm:chPref val="3"/>
+        </dgm:presLayoutVars>
+      </dgm:prSet>
+      <dgm:spPr/>
+    </dgm:pt>
+    <dgm:pt modelId="{E7B74512-D65F-482F-B769-F2BC7DEFFC6F}" type="pres">
+      <dgm:prSet presAssocID="{910B80A7-D60E-40E2-A38C-066B00E9313A}" presName="parTransTwo" presStyleCnt="0"/>
+      <dgm:spPr/>
+    </dgm:pt>
+    <dgm:pt modelId="{55870E53-83A0-4EC5-B167-D242B758BC1B}" type="pres">
+      <dgm:prSet presAssocID="{910B80A7-D60E-40E2-A38C-066B00E9313A}" presName="horzTwo" presStyleCnt="0"/>
+      <dgm:spPr/>
+    </dgm:pt>
+    <dgm:pt modelId="{9DA93D12-2924-420A-92A6-89862793DAE0}" type="pres">
+      <dgm:prSet presAssocID="{B66E7045-4EF4-45C9-95B4-7B8C74CFBBF1}" presName="vertThree" presStyleCnt="0"/>
+      <dgm:spPr/>
+    </dgm:pt>
+    <dgm:pt modelId="{88449BF3-A25A-487C-88F8-EEAF95EDF8B5}" type="pres">
+      <dgm:prSet presAssocID="{B66E7045-4EF4-45C9-95B4-7B8C74CFBBF1}" presName="txThree" presStyleLbl="node3" presStyleIdx="0" presStyleCnt="2">
+        <dgm:presLayoutVars>
+          <dgm:chPref val="3"/>
+        </dgm:presLayoutVars>
+      </dgm:prSet>
+      <dgm:spPr/>
+    </dgm:pt>
+    <dgm:pt modelId="{32D1FCBF-D515-45BC-8E9A-9C760AD27953}" type="pres">
+      <dgm:prSet presAssocID="{B66E7045-4EF4-45C9-95B4-7B8C74CFBBF1}" presName="parTransThree" presStyleCnt="0"/>
+      <dgm:spPr/>
+    </dgm:pt>
+    <dgm:pt modelId="{B8C9306F-0BD7-4082-9E8E-C9AB2A8032F4}" type="pres">
+      <dgm:prSet presAssocID="{B66E7045-4EF4-45C9-95B4-7B8C74CFBBF1}" presName="horzThree" presStyleCnt="0"/>
+      <dgm:spPr/>
+    </dgm:pt>
+    <dgm:pt modelId="{25016B96-62E2-46AD-9348-47BD36794692}" type="pres">
+      <dgm:prSet presAssocID="{BC7EB86F-FC36-44FD-935D-ADEA7F2CB856}" presName="vertFour" presStyleCnt="0">
+        <dgm:presLayoutVars>
+          <dgm:chPref val="3"/>
+        </dgm:presLayoutVars>
+      </dgm:prSet>
+      <dgm:spPr/>
+    </dgm:pt>
+    <dgm:pt modelId="{5E898404-FC17-4382-862F-DA4F053D865B}" type="pres">
+      <dgm:prSet presAssocID="{BC7EB86F-FC36-44FD-935D-ADEA7F2CB856}" presName="txFour" presStyleLbl="node4" presStyleIdx="0" presStyleCnt="4">
+        <dgm:presLayoutVars>
+          <dgm:chPref val="3"/>
+        </dgm:presLayoutVars>
+      </dgm:prSet>
+      <dgm:spPr/>
+    </dgm:pt>
+    <dgm:pt modelId="{FD96EF7A-3913-4F83-84DE-87C5E80A20B8}" type="pres">
+      <dgm:prSet presAssocID="{BC7EB86F-FC36-44FD-935D-ADEA7F2CB856}" presName="horzFour" presStyleCnt="0"/>
+      <dgm:spPr/>
+    </dgm:pt>
+    <dgm:pt modelId="{2053E218-9490-4E28-B047-F58C68C31922}" type="pres">
+      <dgm:prSet presAssocID="{03037568-EA79-42EF-898C-69C0121D9C58}" presName="sibSpaceFour" presStyleCnt="0"/>
+      <dgm:spPr/>
+    </dgm:pt>
+    <dgm:pt modelId="{887770CF-B2C8-4439-8F5D-DDBFA3AB7DAC}" type="pres">
+      <dgm:prSet presAssocID="{8EF8B73D-645D-4C24-A93F-9B0F3D85D0FD}" presName="vertFour" presStyleCnt="0">
+        <dgm:presLayoutVars>
+          <dgm:chPref val="3"/>
+        </dgm:presLayoutVars>
+      </dgm:prSet>
+      <dgm:spPr/>
+    </dgm:pt>
+    <dgm:pt modelId="{CF784A2C-9128-4C2E-8B5E-EFAFA46C9CA3}" type="pres">
+      <dgm:prSet presAssocID="{8EF8B73D-645D-4C24-A93F-9B0F3D85D0FD}" presName="txFour" presStyleLbl="node4" presStyleIdx="1" presStyleCnt="4">
+        <dgm:presLayoutVars>
+          <dgm:chPref val="3"/>
+        </dgm:presLayoutVars>
+      </dgm:prSet>
+      <dgm:spPr/>
+    </dgm:pt>
+    <dgm:pt modelId="{B434FA97-B30A-43FE-BEAF-A5434291F6DA}" type="pres">
+      <dgm:prSet presAssocID="{8EF8B73D-645D-4C24-A93F-9B0F3D85D0FD}" presName="horzFour" presStyleCnt="0"/>
+      <dgm:spPr/>
+    </dgm:pt>
+    <dgm:pt modelId="{4F59A887-4538-4FA8-B906-92B46142BE7A}" type="pres">
+      <dgm:prSet presAssocID="{9BBC81A9-183B-4A2B-AFFC-9DF7637F2F30}" presName="sibSpaceFour" presStyleCnt="0"/>
+      <dgm:spPr/>
+    </dgm:pt>
+    <dgm:pt modelId="{49F766FC-D6D9-4664-AFC6-6C6E20E2719A}" type="pres">
+      <dgm:prSet presAssocID="{7007A174-3E88-47F4-A540-57D660B018A9}" presName="vertFour" presStyleCnt="0">
+        <dgm:presLayoutVars>
+          <dgm:chPref val="3"/>
+        </dgm:presLayoutVars>
+      </dgm:prSet>
+      <dgm:spPr/>
+    </dgm:pt>
+    <dgm:pt modelId="{27C32BB3-52CE-4B91-B6AA-76BC9C2E6FB1}" type="pres">
+      <dgm:prSet presAssocID="{7007A174-3E88-47F4-A540-57D660B018A9}" presName="txFour" presStyleLbl="node4" presStyleIdx="2" presStyleCnt="4">
+        <dgm:presLayoutVars>
+          <dgm:chPref val="3"/>
+        </dgm:presLayoutVars>
+      </dgm:prSet>
+      <dgm:spPr/>
+    </dgm:pt>
+    <dgm:pt modelId="{9CCDDFD4-872B-461D-A62C-E9C175160A0C}" type="pres">
+      <dgm:prSet presAssocID="{7007A174-3E88-47F4-A540-57D660B018A9}" presName="parTransFour" presStyleCnt="0"/>
+      <dgm:spPr/>
+    </dgm:pt>
+    <dgm:pt modelId="{095A0A9B-9BF5-4749-9B2A-D3FB0F4FCE48}" type="pres">
+      <dgm:prSet presAssocID="{7007A174-3E88-47F4-A540-57D660B018A9}" presName="horzFour" presStyleCnt="0"/>
+      <dgm:spPr/>
+    </dgm:pt>
+    <dgm:pt modelId="{36782C01-46AF-4141-B8C6-B715F6D99EDC}" type="pres">
+      <dgm:prSet presAssocID="{8A097B10-F045-46BB-B1B1-72B50EDA8108}" presName="vertFour" presStyleCnt="0">
+        <dgm:presLayoutVars>
+          <dgm:chPref val="3"/>
+        </dgm:presLayoutVars>
+      </dgm:prSet>
+      <dgm:spPr/>
+    </dgm:pt>
+    <dgm:pt modelId="{272F9CC5-3CFF-4615-B734-DAA46D7F24BB}" type="pres">
+      <dgm:prSet presAssocID="{8A097B10-F045-46BB-B1B1-72B50EDA8108}" presName="txFour" presStyleLbl="node4" presStyleIdx="3" presStyleCnt="4">
+        <dgm:presLayoutVars>
+          <dgm:chPref val="3"/>
+        </dgm:presLayoutVars>
+      </dgm:prSet>
+      <dgm:spPr/>
+    </dgm:pt>
+    <dgm:pt modelId="{0C757770-7DF2-4660-8561-A7310E638C05}" type="pres">
+      <dgm:prSet presAssocID="{8A097B10-F045-46BB-B1B1-72B50EDA8108}" presName="horzFour" presStyleCnt="0"/>
+      <dgm:spPr/>
+    </dgm:pt>
+    <dgm:pt modelId="{1EE7214B-FD22-48EF-A1EC-F07BF8BE0C4C}" type="pres">
+      <dgm:prSet presAssocID="{C1091E2E-5C26-47B7-8ED9-66584A777A31}" presName="sibSpaceThree" presStyleCnt="0"/>
+      <dgm:spPr/>
+    </dgm:pt>
+    <dgm:pt modelId="{581FD274-3CDE-4BC1-871C-E537683A0C9C}" type="pres">
+      <dgm:prSet presAssocID="{EDFB4ED5-46D8-4D16-A24F-88765E9CE37B}" presName="vertThree" presStyleCnt="0"/>
+      <dgm:spPr/>
+    </dgm:pt>
+    <dgm:pt modelId="{00A2F657-58A2-45E1-B128-E3A6F3CB1E00}" type="pres">
+      <dgm:prSet presAssocID="{EDFB4ED5-46D8-4D16-A24F-88765E9CE37B}" presName="txThree" presStyleLbl="node3" presStyleIdx="1" presStyleCnt="2">
+        <dgm:presLayoutVars>
+          <dgm:chPref val="3"/>
+        </dgm:presLayoutVars>
+      </dgm:prSet>
+      <dgm:spPr/>
+    </dgm:pt>
+    <dgm:pt modelId="{1AEBCA98-F582-4815-8442-78997B7748AB}" type="pres">
+      <dgm:prSet presAssocID="{EDFB4ED5-46D8-4D16-A24F-88765E9CE37B}" presName="horzThree" presStyleCnt="0"/>
+      <dgm:spPr/>
+    </dgm:pt>
+  </dgm:ptLst>
+  <dgm:cxnLst>
+    <dgm:cxn modelId="{AA5EA217-E063-40B6-AC2F-3FD249E3209D}" type="presOf" srcId="{7007A174-3E88-47F4-A540-57D660B018A9}" destId="{27C32BB3-52CE-4B91-B6AA-76BC9C2E6FB1}" srcOrd="0" destOrd="0" presId="urn:microsoft.com/office/officeart/2005/8/layout/architecture"/>
+    <dgm:cxn modelId="{65707B22-528A-4E4D-8D8F-2A1EA5EC7A6C}" srcId="{B66E7045-4EF4-45C9-95B4-7B8C74CFBBF1}" destId="{7007A174-3E88-47F4-A540-57D660B018A9}" srcOrd="2" destOrd="0" parTransId="{2FC32CEC-191B-4454-891C-57ECC83DD555}" sibTransId="{05B5E755-1EB1-4252-B66B-F5450184F94C}"/>
+    <dgm:cxn modelId="{01992561-C50F-4CD7-A9EC-23FA2060A1FF}" type="presOf" srcId="{8A097B10-F045-46BB-B1B1-72B50EDA8108}" destId="{272F9CC5-3CFF-4615-B734-DAA46D7F24BB}" srcOrd="0" destOrd="0" presId="urn:microsoft.com/office/officeart/2005/8/layout/architecture"/>
+    <dgm:cxn modelId="{7E23A762-0F7B-402A-87C7-3BDDB6179F5A}" srcId="{B66E7045-4EF4-45C9-95B4-7B8C74CFBBF1}" destId="{BC7EB86F-FC36-44FD-935D-ADEA7F2CB856}" srcOrd="0" destOrd="0" parTransId="{C2299E9B-B791-4EE8-9788-F12F49DB6D93}" sibTransId="{03037568-EA79-42EF-898C-69C0121D9C58}"/>
+    <dgm:cxn modelId="{7836C459-5FA8-439A-BB4C-1E3ECFC5C0FC}" srcId="{B503FE60-C767-4EED-AF9F-21DC13FB930E}" destId="{910B80A7-D60E-40E2-A38C-066B00E9313A}" srcOrd="0" destOrd="0" parTransId="{375E37A8-3933-41FB-AB35-B45C6C1D351B}" sibTransId="{91D2A1FB-AFEE-42B6-B950-2601408A71F6}"/>
+    <dgm:cxn modelId="{5FA73787-A11E-4CE4-A44C-470065AD5B3A}" srcId="{910B80A7-D60E-40E2-A38C-066B00E9313A}" destId="{EDFB4ED5-46D8-4D16-A24F-88765E9CE37B}" srcOrd="1" destOrd="0" parTransId="{8DAC9960-8CD8-4345-B98C-6BF6F67D6410}" sibTransId="{D890968B-3136-4668-9D99-44948777C9A8}"/>
+    <dgm:cxn modelId="{DB81BE8B-40FA-440E-AF4A-797EFB8905B3}" srcId="{910B80A7-D60E-40E2-A38C-066B00E9313A}" destId="{B66E7045-4EF4-45C9-95B4-7B8C74CFBBF1}" srcOrd="0" destOrd="0" parTransId="{211B7288-AD6D-4101-8BBE-B8431CD53435}" sibTransId="{C1091E2E-5C26-47B7-8ED9-66584A777A31}"/>
+    <dgm:cxn modelId="{51D95AA0-3305-450B-B33E-654039353A15}" srcId="{B66E7045-4EF4-45C9-95B4-7B8C74CFBBF1}" destId="{8EF8B73D-645D-4C24-A93F-9B0F3D85D0FD}" srcOrd="1" destOrd="0" parTransId="{A24D958F-A5C7-4AC3-96A6-41EC10B17800}" sibTransId="{9BBC81A9-183B-4A2B-AFFC-9DF7637F2F30}"/>
+    <dgm:cxn modelId="{DB8829A6-7DAD-4E73-A660-F7F6FF7C1634}" srcId="{204D8837-5DBB-491B-9046-2CF271795AB8}" destId="{B503FE60-C767-4EED-AF9F-21DC13FB930E}" srcOrd="0" destOrd="0" parTransId="{0C2D02E4-884F-416B-A78C-E0CD6BC7DD1E}" sibTransId="{6E235D28-082C-4386-B23D-687EAA5E1F4C}"/>
+    <dgm:cxn modelId="{802EBDAA-F90B-4964-BF89-D4FA78458A8F}" type="presOf" srcId="{EDFB4ED5-46D8-4D16-A24F-88765E9CE37B}" destId="{00A2F657-58A2-45E1-B128-E3A6F3CB1E00}" srcOrd="0" destOrd="0" presId="urn:microsoft.com/office/officeart/2005/8/layout/architecture"/>
+    <dgm:cxn modelId="{3B0727B0-2F4D-4EE8-BFC6-AF54DA981003}" type="presOf" srcId="{BC7EB86F-FC36-44FD-935D-ADEA7F2CB856}" destId="{5E898404-FC17-4382-862F-DA4F053D865B}" srcOrd="0" destOrd="0" presId="urn:microsoft.com/office/officeart/2005/8/layout/architecture"/>
+    <dgm:cxn modelId="{A43DFFB3-2728-4641-940D-772619E068E7}" type="presOf" srcId="{910B80A7-D60E-40E2-A38C-066B00E9313A}" destId="{F8CA7072-7D18-45BD-B732-FDE65178DFD2}" srcOrd="0" destOrd="0" presId="urn:microsoft.com/office/officeart/2005/8/layout/architecture"/>
+    <dgm:cxn modelId="{51572AB7-E9EA-4200-A884-ACE4F17542E3}" type="presOf" srcId="{B66E7045-4EF4-45C9-95B4-7B8C74CFBBF1}" destId="{88449BF3-A25A-487C-88F8-EEAF95EDF8B5}" srcOrd="0" destOrd="0" presId="urn:microsoft.com/office/officeart/2005/8/layout/architecture"/>
+    <dgm:cxn modelId="{37CC0CB8-5B0C-4FE8-A8CA-F1443EF6B134}" type="presOf" srcId="{8EF8B73D-645D-4C24-A93F-9B0F3D85D0FD}" destId="{CF784A2C-9128-4C2E-8B5E-EFAFA46C9CA3}" srcOrd="0" destOrd="0" presId="urn:microsoft.com/office/officeart/2005/8/layout/architecture"/>
+    <dgm:cxn modelId="{017CA2C4-F68F-40E5-B911-04F5AFFB7F13}" srcId="{7007A174-3E88-47F4-A540-57D660B018A9}" destId="{8A097B10-F045-46BB-B1B1-72B50EDA8108}" srcOrd="0" destOrd="0" parTransId="{43B26ECC-B04B-4804-99FF-0D02A13DD40C}" sibTransId="{22087AEE-0F2A-4B28-97BF-071F9669CEA4}"/>
+    <dgm:cxn modelId="{2357B5D1-4C94-483B-8E6F-7F1372399FD8}" type="presOf" srcId="{204D8837-5DBB-491B-9046-2CF271795AB8}" destId="{5A1B9F10-695C-4E24-9BF0-6B92AEB5C6AD}" srcOrd="0" destOrd="0" presId="urn:microsoft.com/office/officeart/2005/8/layout/architecture"/>
+    <dgm:cxn modelId="{C71A2FF3-82A6-4373-9253-DEF422DC8758}" type="presOf" srcId="{B503FE60-C767-4EED-AF9F-21DC13FB930E}" destId="{00C44FFE-121D-4A99-8F70-BF9FBB00EFBF}" srcOrd="0" destOrd="0" presId="urn:microsoft.com/office/officeart/2005/8/layout/architecture"/>
+    <dgm:cxn modelId="{97CB8F0C-0881-4AC7-9015-D54CB5D8F6CB}" type="presParOf" srcId="{5A1B9F10-695C-4E24-9BF0-6B92AEB5C6AD}" destId="{933F2FA4-7008-4E19-8E19-674AF36D74BA}" srcOrd="0" destOrd="0" presId="urn:microsoft.com/office/officeart/2005/8/layout/architecture"/>
+    <dgm:cxn modelId="{C58D2DE6-AFE9-4625-801B-CB6D93F05CE5}" type="presParOf" srcId="{933F2FA4-7008-4E19-8E19-674AF36D74BA}" destId="{00C44FFE-121D-4A99-8F70-BF9FBB00EFBF}" srcOrd="0" destOrd="0" presId="urn:microsoft.com/office/officeart/2005/8/layout/architecture"/>
+    <dgm:cxn modelId="{6FFC6432-29E3-4050-A9C8-0983E9BDE6E9}" type="presParOf" srcId="{933F2FA4-7008-4E19-8E19-674AF36D74BA}" destId="{12E7773A-7335-49BF-A31C-D99581297130}" srcOrd="1" destOrd="0" presId="urn:microsoft.com/office/officeart/2005/8/layout/architecture"/>
+    <dgm:cxn modelId="{CC226D84-7759-443D-B9AC-C684A76F7EE6}" type="presParOf" srcId="{933F2FA4-7008-4E19-8E19-674AF36D74BA}" destId="{8B1A5913-6392-43B8-B744-4025A4C5CA8C}" srcOrd="2" destOrd="0" presId="urn:microsoft.com/office/officeart/2005/8/layout/architecture"/>
+    <dgm:cxn modelId="{C8B379ED-3781-430D-AADA-3B32BCE4125E}" type="presParOf" srcId="{8B1A5913-6392-43B8-B744-4025A4C5CA8C}" destId="{922D0556-6002-403C-9FC9-1C70A6D400AE}" srcOrd="0" destOrd="0" presId="urn:microsoft.com/office/officeart/2005/8/layout/architecture"/>
+    <dgm:cxn modelId="{89BE7A0E-B756-4059-ACDF-F786CB09E713}" type="presParOf" srcId="{922D0556-6002-403C-9FC9-1C70A6D400AE}" destId="{F8CA7072-7D18-45BD-B732-FDE65178DFD2}" srcOrd="0" destOrd="0" presId="urn:microsoft.com/office/officeart/2005/8/layout/architecture"/>
+    <dgm:cxn modelId="{D05F82D8-3C70-4951-BBCC-1C7B30ECB654}" type="presParOf" srcId="{922D0556-6002-403C-9FC9-1C70A6D400AE}" destId="{E7B74512-D65F-482F-B769-F2BC7DEFFC6F}" srcOrd="1" destOrd="0" presId="urn:microsoft.com/office/officeart/2005/8/layout/architecture"/>
+    <dgm:cxn modelId="{4D654677-B5D2-4439-83A0-129A839F95F9}" type="presParOf" srcId="{922D0556-6002-403C-9FC9-1C70A6D400AE}" destId="{55870E53-83A0-4EC5-B167-D242B758BC1B}" srcOrd="2" destOrd="0" presId="urn:microsoft.com/office/officeart/2005/8/layout/architecture"/>
+    <dgm:cxn modelId="{C202C81A-AAA9-408A-989F-341E194E14C4}" type="presParOf" srcId="{55870E53-83A0-4EC5-B167-D242B758BC1B}" destId="{9DA93D12-2924-420A-92A6-89862793DAE0}" srcOrd="0" destOrd="0" presId="urn:microsoft.com/office/officeart/2005/8/layout/architecture"/>
+    <dgm:cxn modelId="{6C19FCF9-C76B-4487-B015-CD6DE868C825}" type="presParOf" srcId="{9DA93D12-2924-420A-92A6-89862793DAE0}" destId="{88449BF3-A25A-487C-88F8-EEAF95EDF8B5}" srcOrd="0" destOrd="0" presId="urn:microsoft.com/office/officeart/2005/8/layout/architecture"/>
+    <dgm:cxn modelId="{0F56D410-4488-491D-953C-E960654C54BB}" type="presParOf" srcId="{9DA93D12-2924-420A-92A6-89862793DAE0}" destId="{32D1FCBF-D515-45BC-8E9A-9C760AD27953}" srcOrd="1" destOrd="0" presId="urn:microsoft.com/office/officeart/2005/8/layout/architecture"/>
+    <dgm:cxn modelId="{3327797C-8484-4A52-825F-EEF1427A3D4C}" type="presParOf" srcId="{9DA93D12-2924-420A-92A6-89862793DAE0}" destId="{B8C9306F-0BD7-4082-9E8E-C9AB2A8032F4}" srcOrd="2" destOrd="0" presId="urn:microsoft.com/office/officeart/2005/8/layout/architecture"/>
+    <dgm:cxn modelId="{72024585-15E7-4B7E-BC71-A1ECE99ADFE0}" type="presParOf" srcId="{B8C9306F-0BD7-4082-9E8E-C9AB2A8032F4}" destId="{25016B96-62E2-46AD-9348-47BD36794692}" srcOrd="0" destOrd="0" presId="urn:microsoft.com/office/officeart/2005/8/layout/architecture"/>
+    <dgm:cxn modelId="{72F9EA57-CD82-4E29-A34F-64BE4C25961D}" type="presParOf" srcId="{25016B96-62E2-46AD-9348-47BD36794692}" destId="{5E898404-FC17-4382-862F-DA4F053D865B}" srcOrd="0" destOrd="0" presId="urn:microsoft.com/office/officeart/2005/8/layout/architecture"/>
+    <dgm:cxn modelId="{3DD4BE49-4457-467B-8F07-F3B6CA4AC913}" type="presParOf" srcId="{25016B96-62E2-46AD-9348-47BD36794692}" destId="{FD96EF7A-3913-4F83-84DE-87C5E80A20B8}" srcOrd="1" destOrd="0" presId="urn:microsoft.com/office/officeart/2005/8/layout/architecture"/>
+    <dgm:cxn modelId="{12FC97F8-2870-4276-8CA7-E11F9021DAF4}" type="presParOf" srcId="{B8C9306F-0BD7-4082-9E8E-C9AB2A8032F4}" destId="{2053E218-9490-4E28-B047-F58C68C31922}" srcOrd="1" destOrd="0" presId="urn:microsoft.com/office/officeart/2005/8/layout/architecture"/>
+    <dgm:cxn modelId="{E1DA87A3-3D8E-4221-8C8A-DA21A6F5AAB1}" type="presParOf" srcId="{B8C9306F-0BD7-4082-9E8E-C9AB2A8032F4}" destId="{887770CF-B2C8-4439-8F5D-DDBFA3AB7DAC}" srcOrd="2" destOrd="0" presId="urn:microsoft.com/office/officeart/2005/8/layout/architecture"/>
+    <dgm:cxn modelId="{892D5E72-EB86-4E99-8C6A-EF54B5A84D07}" type="presParOf" srcId="{887770CF-B2C8-4439-8F5D-DDBFA3AB7DAC}" destId="{CF784A2C-9128-4C2E-8B5E-EFAFA46C9CA3}" srcOrd="0" destOrd="0" presId="urn:microsoft.com/office/officeart/2005/8/layout/architecture"/>
+    <dgm:cxn modelId="{3655EA61-FD22-448E-990D-18559660F19D}" type="presParOf" srcId="{887770CF-B2C8-4439-8F5D-DDBFA3AB7DAC}" destId="{B434FA97-B30A-43FE-BEAF-A5434291F6DA}" srcOrd="1" destOrd="0" presId="urn:microsoft.com/office/officeart/2005/8/layout/architecture"/>
+    <dgm:cxn modelId="{1AA575A4-1122-42C2-B7B3-C5AB5BDCFD8B}" type="presParOf" srcId="{B8C9306F-0BD7-4082-9E8E-C9AB2A8032F4}" destId="{4F59A887-4538-4FA8-B906-92B46142BE7A}" srcOrd="3" destOrd="0" presId="urn:microsoft.com/office/officeart/2005/8/layout/architecture"/>
+    <dgm:cxn modelId="{EE981B5B-402A-47EA-AE73-E26A50EB4AD5}" type="presParOf" srcId="{B8C9306F-0BD7-4082-9E8E-C9AB2A8032F4}" destId="{49F766FC-D6D9-4664-AFC6-6C6E20E2719A}" srcOrd="4" destOrd="0" presId="urn:microsoft.com/office/officeart/2005/8/layout/architecture"/>
+    <dgm:cxn modelId="{A07AB911-3673-4BFA-8F85-66DC35DAF829}" type="presParOf" srcId="{49F766FC-D6D9-4664-AFC6-6C6E20E2719A}" destId="{27C32BB3-52CE-4B91-B6AA-76BC9C2E6FB1}" srcOrd="0" destOrd="0" presId="urn:microsoft.com/office/officeart/2005/8/layout/architecture"/>
+    <dgm:cxn modelId="{6300C5D6-36A2-44A1-A7BD-2960697FDBC2}" type="presParOf" srcId="{49F766FC-D6D9-4664-AFC6-6C6E20E2719A}" destId="{9CCDDFD4-872B-461D-A62C-E9C175160A0C}" srcOrd="1" destOrd="0" presId="urn:microsoft.com/office/officeart/2005/8/layout/architecture"/>
+    <dgm:cxn modelId="{4A0A2F19-5A43-48AE-A93F-AD31A56C92F3}" type="presParOf" srcId="{49F766FC-D6D9-4664-AFC6-6C6E20E2719A}" destId="{095A0A9B-9BF5-4749-9B2A-D3FB0F4FCE48}" srcOrd="2" destOrd="0" presId="urn:microsoft.com/office/officeart/2005/8/layout/architecture"/>
+    <dgm:cxn modelId="{82A59459-7377-4093-BFDA-FA42F29F8D18}" type="presParOf" srcId="{095A0A9B-9BF5-4749-9B2A-D3FB0F4FCE48}" destId="{36782C01-46AF-4141-B8C6-B715F6D99EDC}" srcOrd="0" destOrd="0" presId="urn:microsoft.com/office/officeart/2005/8/layout/architecture"/>
+    <dgm:cxn modelId="{4391CD6F-D9F9-4F3C-9DD4-F224511BAC48}" type="presParOf" srcId="{36782C01-46AF-4141-B8C6-B715F6D99EDC}" destId="{272F9CC5-3CFF-4615-B734-DAA46D7F24BB}" srcOrd="0" destOrd="0" presId="urn:microsoft.com/office/officeart/2005/8/layout/architecture"/>
+    <dgm:cxn modelId="{0E376709-4984-499B-B4FB-E16230A82C8E}" type="presParOf" srcId="{36782C01-46AF-4141-B8C6-B715F6D99EDC}" destId="{0C757770-7DF2-4660-8561-A7310E638C05}" srcOrd="1" destOrd="0" presId="urn:microsoft.com/office/officeart/2005/8/layout/architecture"/>
+    <dgm:cxn modelId="{24CB6BB7-8EA0-4A08-B961-4AF8AB17CAB8}" type="presParOf" srcId="{55870E53-83A0-4EC5-B167-D242B758BC1B}" destId="{1EE7214B-FD22-48EF-A1EC-F07BF8BE0C4C}" srcOrd="1" destOrd="0" presId="urn:microsoft.com/office/officeart/2005/8/layout/architecture"/>
+    <dgm:cxn modelId="{2E2A69D4-206A-4B63-B31B-2AE53E24552A}" type="presParOf" srcId="{55870E53-83A0-4EC5-B167-D242B758BC1B}" destId="{581FD274-3CDE-4BC1-871C-E537683A0C9C}" srcOrd="2" destOrd="0" presId="urn:microsoft.com/office/officeart/2005/8/layout/architecture"/>
+    <dgm:cxn modelId="{BF3E1F83-3F6D-48A9-AECA-AA1993C5A997}" type="presParOf" srcId="{581FD274-3CDE-4BC1-871C-E537683A0C9C}" destId="{00A2F657-58A2-45E1-B128-E3A6F3CB1E00}" srcOrd="0" destOrd="0" presId="urn:microsoft.com/office/officeart/2005/8/layout/architecture"/>
+    <dgm:cxn modelId="{671B7787-1D4B-438E-AFB8-9B39B7DCECAE}" type="presParOf" srcId="{581FD274-3CDE-4BC1-871C-E537683A0C9C}" destId="{1AEBCA98-F582-4815-8442-78997B7748AB}" srcOrd="1" destOrd="0" presId="urn:microsoft.com/office/officeart/2005/8/layout/architecture"/>
+  </dgm:cxnLst>
+  <dgm:bg/>
+  <dgm:whole/>
+  <dgm:extLst>
+    <a:ext uri="http://schemas.microsoft.com/office/drawing/2008/diagram">
+      <dsp:dataModelExt xmlns:dsp="http://schemas.microsoft.com/office/drawing/2008/diagram" relId="rId6" minVer="http://schemas.openxmlformats.org/drawingml/2006/diagram"/>
+    </a:ext>
+  </dgm:extLst>
+</dgm:dataModel>
+</file>
+
+<file path=ppt/diagrams/drawing1.xml><?xml version="1.0" encoding="utf-8"?>
+<dsp:drawing xmlns:dgm="http://schemas.openxmlformats.org/drawingml/2006/diagram" xmlns:dsp="http://schemas.microsoft.com/office/drawing/2008/diagram" xmlns:a="http://schemas.openxmlformats.org/drawingml/2006/main">
+  <dsp:spTree>
+    <dsp:nvGrpSpPr>
+      <dsp:cNvPr id="0" name=""/>
+      <dsp:cNvGrpSpPr/>
+    </dsp:nvGrpSpPr>
+    <dsp:grpSpPr/>
+    <dsp:sp modelId="{00C44FFE-121D-4A99-8F70-BF9FBB00EFBF}">
+      <dsp:nvSpPr>
+        <dsp:cNvPr id="0" name=""/>
+        <dsp:cNvSpPr/>
+      </dsp:nvSpPr>
+      <dsp:spPr>
+        <a:xfrm>
+          <a:off x="4847" y="5572644"/>
+          <a:ext cx="10353504" cy="1284200"/>
+        </a:xfrm>
+        <a:prstGeom prst="roundRect">
+          <a:avLst>
+            <a:gd name="adj" fmla="val 10000"/>
+          </a:avLst>
+        </a:prstGeom>
+        <a:solidFill>
+          <a:schemeClr val="accent1">
+            <a:hueOff val="0"/>
+            <a:satOff val="0"/>
+            <a:lumOff val="0"/>
+            <a:alphaOff val="0"/>
+          </a:schemeClr>
+        </a:solidFill>
+        <a:ln w="12700" cap="flat" cmpd="sng" algn="ctr">
+          <a:solidFill>
+            <a:schemeClr val="lt1">
+              <a:hueOff val="0"/>
+              <a:satOff val="0"/>
+              <a:lumOff val="0"/>
+              <a:alphaOff val="0"/>
+            </a:schemeClr>
+          </a:solidFill>
+          <a:prstDash val="solid"/>
+          <a:miter lim="800000"/>
+        </a:ln>
+        <a:effectLst/>
+      </dsp:spPr>
+      <dsp:style>
+        <a:lnRef idx="2">
+          <a:scrgbClr r="0" g="0" b="0"/>
+        </a:lnRef>
+        <a:fillRef idx="1">
+          <a:scrgbClr r="0" g="0" b="0"/>
+        </a:fillRef>
+        <a:effectRef idx="0">
+          <a:scrgbClr r="0" g="0" b="0"/>
+        </a:effectRef>
+        <a:fontRef idx="minor">
+          <a:schemeClr val="lt1"/>
+        </a:fontRef>
+      </dsp:style>
+      <dsp:txBody>
+        <a:bodyPr spcFirstLastPara="0" vert="horz" wrap="square" lIns="213360" tIns="213360" rIns="213360" bIns="213360" numCol="1" spcCol="1270" anchor="ctr" anchorCtr="0">
+          <a:noAutofit/>
+        </a:bodyPr>
+        <a:lstStyle/>
+        <a:p>
+          <a:pPr marL="0" lvl="0" indent="0" algn="ctr" defTabSz="2489200">
+            <a:lnSpc>
+              <a:spcPct val="90000"/>
+            </a:lnSpc>
+            <a:spcBef>
+              <a:spcPct val="0"/>
+            </a:spcBef>
+            <a:spcAft>
+              <a:spcPct val="35000"/>
+            </a:spcAft>
+            <a:buNone/>
+          </a:pPr>
+          <a:r>
+            <a:rPr lang="en-US" sz="5600" kern="1200" dirty="0"/>
+            <a:t>Serializable</a:t>
+          </a:r>
+          <a:endParaRPr lang="nl-NL" sz="5600" kern="1200" dirty="0"/>
+        </a:p>
+      </dsp:txBody>
+      <dsp:txXfrm>
+        <a:off x="42460" y="5610257"/>
+        <a:ext cx="10278278" cy="1208974"/>
+      </dsp:txXfrm>
+    </dsp:sp>
+    <dsp:sp modelId="{F8CA7072-7D18-45BD-B732-FDE65178DFD2}">
+      <dsp:nvSpPr>
+        <dsp:cNvPr id="0" name=""/>
+        <dsp:cNvSpPr/>
+      </dsp:nvSpPr>
+      <dsp:spPr>
+        <a:xfrm>
+          <a:off x="4847" y="4179772"/>
+          <a:ext cx="10353504" cy="1284200"/>
+        </a:xfrm>
+        <a:prstGeom prst="roundRect">
+          <a:avLst>
+            <a:gd name="adj" fmla="val 10000"/>
+          </a:avLst>
+        </a:prstGeom>
+        <a:solidFill>
+          <a:schemeClr val="accent1">
+            <a:hueOff val="0"/>
+            <a:satOff val="0"/>
+            <a:lumOff val="0"/>
+            <a:alphaOff val="0"/>
+          </a:schemeClr>
+        </a:solidFill>
+        <a:ln w="12700" cap="flat" cmpd="sng" algn="ctr">
+          <a:solidFill>
+            <a:schemeClr val="lt1">
+              <a:hueOff val="0"/>
+              <a:satOff val="0"/>
+              <a:lumOff val="0"/>
+              <a:alphaOff val="0"/>
+            </a:schemeClr>
+          </a:solidFill>
+          <a:prstDash val="solid"/>
+          <a:miter lim="800000"/>
+        </a:ln>
+        <a:effectLst/>
+      </dsp:spPr>
+      <dsp:style>
+        <a:lnRef idx="2">
+          <a:scrgbClr r="0" g="0" b="0"/>
+        </a:lnRef>
+        <a:fillRef idx="1">
+          <a:scrgbClr r="0" g="0" b="0"/>
+        </a:fillRef>
+        <a:effectRef idx="0">
+          <a:scrgbClr r="0" g="0" b="0"/>
+        </a:effectRef>
+        <a:fontRef idx="minor">
+          <a:schemeClr val="lt1"/>
+        </a:fontRef>
+      </dsp:style>
+      <dsp:txBody>
+        <a:bodyPr spcFirstLastPara="0" vert="horz" wrap="square" lIns="213360" tIns="213360" rIns="213360" bIns="213360" numCol="1" spcCol="1270" anchor="ctr" anchorCtr="0">
+          <a:noAutofit/>
+        </a:bodyPr>
+        <a:lstStyle/>
+        <a:p>
+          <a:pPr marL="0" lvl="0" indent="0" algn="ctr" defTabSz="2489200">
+            <a:lnSpc>
+              <a:spcPct val="90000"/>
+            </a:lnSpc>
+            <a:spcBef>
+              <a:spcPct val="0"/>
+            </a:spcBef>
+            <a:spcAft>
+              <a:spcPct val="35000"/>
+            </a:spcAft>
+            <a:buNone/>
+          </a:pPr>
+          <a:r>
+            <a:rPr lang="en-US" sz="5600" kern="1200" dirty="0"/>
+            <a:t>List -&gt; Vector, Point</a:t>
+          </a:r>
+          <a:endParaRPr lang="nl-NL" sz="5600" kern="1200" dirty="0"/>
+        </a:p>
+      </dsp:txBody>
+      <dsp:txXfrm>
+        <a:off x="42460" y="4217385"/>
+        <a:ext cx="10278278" cy="1208974"/>
+      </dsp:txXfrm>
+    </dsp:sp>
+    <dsp:sp modelId="{88449BF3-A25A-487C-88F8-EEAF95EDF8B5}">
+      <dsp:nvSpPr>
+        <dsp:cNvPr id="0" name=""/>
+        <dsp:cNvSpPr/>
+      </dsp:nvSpPr>
+      <dsp:spPr>
+        <a:xfrm>
+          <a:off x="4847" y="2786899"/>
+          <a:ext cx="7711890" cy="1284200"/>
+        </a:xfrm>
+        <a:prstGeom prst="roundRect">
+          <a:avLst>
+            <a:gd name="adj" fmla="val 10000"/>
+          </a:avLst>
+        </a:prstGeom>
+        <a:solidFill>
+          <a:schemeClr val="accent1">
+            <a:hueOff val="0"/>
+            <a:satOff val="0"/>
+            <a:lumOff val="0"/>
+            <a:alphaOff val="0"/>
+          </a:schemeClr>
+        </a:solidFill>
+        <a:ln w="12700" cap="flat" cmpd="sng" algn="ctr">
+          <a:solidFill>
+            <a:schemeClr val="lt1">
+              <a:hueOff val="0"/>
+              <a:satOff val="0"/>
+              <a:lumOff val="0"/>
+              <a:alphaOff val="0"/>
+            </a:schemeClr>
+          </a:solidFill>
+          <a:prstDash val="solid"/>
+          <a:miter lim="800000"/>
+        </a:ln>
+        <a:effectLst/>
+      </dsp:spPr>
+      <dsp:style>
+        <a:lnRef idx="2">
+          <a:scrgbClr r="0" g="0" b="0"/>
+        </a:lnRef>
+        <a:fillRef idx="1">
+          <a:scrgbClr r="0" g="0" b="0"/>
+        </a:fillRef>
+        <a:effectRef idx="0">
+          <a:scrgbClr r="0" g="0" b="0"/>
+        </a:effectRef>
+        <a:fontRef idx="minor">
+          <a:schemeClr val="lt1"/>
+        </a:fontRef>
+      </dsp:style>
+      <dsp:txBody>
+        <a:bodyPr spcFirstLastPara="0" vert="horz" wrap="square" lIns="213360" tIns="213360" rIns="213360" bIns="213360" numCol="1" spcCol="1270" anchor="ctr" anchorCtr="0">
+          <a:noAutofit/>
+        </a:bodyPr>
+        <a:lstStyle/>
+        <a:p>
+          <a:pPr marL="0" lvl="0" indent="0" algn="ctr" defTabSz="2489200">
+            <a:lnSpc>
+              <a:spcPct val="90000"/>
+            </a:lnSpc>
+            <a:spcBef>
+              <a:spcPct val="0"/>
+            </a:spcBef>
+            <a:spcAft>
+              <a:spcPct val="35000"/>
+            </a:spcAft>
+            <a:buNone/>
+          </a:pPr>
+          <a:r>
+            <a:rPr lang="en-US" sz="5600" kern="1200" dirty="0"/>
+            <a:t>Vector[Vector]</a:t>
+          </a:r>
+          <a:endParaRPr lang="nl-NL" sz="5600" kern="1200" dirty="0"/>
+        </a:p>
+      </dsp:txBody>
+      <dsp:txXfrm>
+        <a:off x="42460" y="2824512"/>
+        <a:ext cx="7636664" cy="1208974"/>
+      </dsp:txXfrm>
+    </dsp:sp>
+    <dsp:sp modelId="{5E898404-FC17-4382-862F-DA4F053D865B}">
+      <dsp:nvSpPr>
+        <dsp:cNvPr id="0" name=""/>
+        <dsp:cNvSpPr/>
+      </dsp:nvSpPr>
+      <dsp:spPr>
+        <a:xfrm>
+          <a:off x="4847" y="1394027"/>
+          <a:ext cx="2535138" cy="1284200"/>
+        </a:xfrm>
+        <a:prstGeom prst="roundRect">
+          <a:avLst>
+            <a:gd name="adj" fmla="val 10000"/>
+          </a:avLst>
+        </a:prstGeom>
+        <a:solidFill>
+          <a:schemeClr val="accent1">
+            <a:hueOff val="0"/>
+            <a:satOff val="0"/>
+            <a:lumOff val="0"/>
+            <a:alphaOff val="0"/>
+          </a:schemeClr>
+        </a:solidFill>
+        <a:ln w="12700" cap="flat" cmpd="sng" algn="ctr">
+          <a:solidFill>
+            <a:schemeClr val="lt1">
+              <a:hueOff val="0"/>
+              <a:satOff val="0"/>
+              <a:lumOff val="0"/>
+              <a:alphaOff val="0"/>
+            </a:schemeClr>
+          </a:solidFill>
+          <a:prstDash val="solid"/>
+          <a:miter lim="800000"/>
+        </a:ln>
+        <a:effectLst/>
+      </dsp:spPr>
+      <dsp:style>
+        <a:lnRef idx="2">
+          <a:scrgbClr r="0" g="0" b="0"/>
+        </a:lnRef>
+        <a:fillRef idx="1">
+          <a:scrgbClr r="0" g="0" b="0"/>
+        </a:fillRef>
+        <a:effectRef idx="0">
+          <a:scrgbClr r="0" g="0" b="0"/>
+        </a:effectRef>
+        <a:fontRef idx="minor">
+          <a:schemeClr val="lt1"/>
+        </a:fontRef>
+      </dsp:style>
+      <dsp:txBody>
+        <a:bodyPr spcFirstLastPara="0" vert="horz" wrap="square" lIns="152400" tIns="152400" rIns="152400" bIns="152400" numCol="1" spcCol="1270" anchor="ctr" anchorCtr="0">
+          <a:noAutofit/>
+        </a:bodyPr>
+        <a:lstStyle/>
+        <a:p>
+          <a:pPr marL="0" lvl="0" indent="0" algn="ctr" defTabSz="1778000">
+            <a:lnSpc>
+              <a:spcPct val="90000"/>
+            </a:lnSpc>
+            <a:spcBef>
+              <a:spcPct val="0"/>
+            </a:spcBef>
+            <a:spcAft>
+              <a:spcPct val="35000"/>
+            </a:spcAft>
+            <a:buNone/>
+          </a:pPr>
+          <a:r>
+            <a:rPr lang="en-US" sz="4000" kern="1200" dirty="0"/>
+            <a:t>Matrix</a:t>
+          </a:r>
+          <a:endParaRPr lang="nl-NL" sz="4000" kern="1200" dirty="0"/>
+        </a:p>
+      </dsp:txBody>
+      <dsp:txXfrm>
+        <a:off x="42460" y="1431640"/>
+        <a:ext cx="2459912" cy="1208974"/>
+      </dsp:txXfrm>
+    </dsp:sp>
+    <dsp:sp modelId="{CF784A2C-9128-4C2E-8B5E-EFAFA46C9CA3}">
+      <dsp:nvSpPr>
+        <dsp:cNvPr id="0" name=""/>
+        <dsp:cNvSpPr/>
+      </dsp:nvSpPr>
+      <dsp:spPr>
+        <a:xfrm>
+          <a:off x="2593223" y="1394027"/>
+          <a:ext cx="2535138" cy="1284200"/>
+        </a:xfrm>
+        <a:prstGeom prst="roundRect">
+          <a:avLst>
+            <a:gd name="adj" fmla="val 10000"/>
+          </a:avLst>
+        </a:prstGeom>
+        <a:solidFill>
+          <a:schemeClr val="accent1">
+            <a:hueOff val="0"/>
+            <a:satOff val="0"/>
+            <a:lumOff val="0"/>
+            <a:alphaOff val="0"/>
+          </a:schemeClr>
+        </a:solidFill>
+        <a:ln w="12700" cap="flat" cmpd="sng" algn="ctr">
+          <a:solidFill>
+            <a:schemeClr val="lt1">
+              <a:hueOff val="0"/>
+              <a:satOff val="0"/>
+              <a:lumOff val="0"/>
+              <a:alphaOff val="0"/>
+            </a:schemeClr>
+          </a:solidFill>
+          <a:prstDash val="solid"/>
+          <a:miter lim="800000"/>
+        </a:ln>
+        <a:effectLst/>
+      </dsp:spPr>
+      <dsp:style>
+        <a:lnRef idx="2">
+          <a:scrgbClr r="0" g="0" b="0"/>
+        </a:lnRef>
+        <a:fillRef idx="1">
+          <a:scrgbClr r="0" g="0" b="0"/>
+        </a:fillRef>
+        <a:effectRef idx="0">
+          <a:scrgbClr r="0" g="0" b="0"/>
+        </a:effectRef>
+        <a:fontRef idx="minor">
+          <a:schemeClr val="lt1"/>
+        </a:fontRef>
+      </dsp:style>
+      <dsp:txBody>
+        <a:bodyPr spcFirstLastPara="0" vert="horz" wrap="square" lIns="152400" tIns="152400" rIns="152400" bIns="152400" numCol="1" spcCol="1270" anchor="ctr" anchorCtr="0">
+          <a:noAutofit/>
+        </a:bodyPr>
+        <a:lstStyle/>
+        <a:p>
+          <a:pPr marL="0" lvl="0" indent="0" algn="ctr" defTabSz="1778000">
+            <a:lnSpc>
+              <a:spcPct val="90000"/>
+            </a:lnSpc>
+            <a:spcBef>
+              <a:spcPct val="0"/>
+            </a:spcBef>
+            <a:spcAft>
+              <a:spcPct val="35000"/>
+            </a:spcAft>
+            <a:buNone/>
+          </a:pPr>
+          <a:r>
+            <a:rPr lang="en-US" sz="4000" kern="1200" dirty="0"/>
+            <a:t>Line</a:t>
+          </a:r>
+          <a:endParaRPr lang="nl-NL" sz="4000" kern="1200" dirty="0"/>
+        </a:p>
+      </dsp:txBody>
+      <dsp:txXfrm>
+        <a:off x="2630836" y="1431640"/>
+        <a:ext cx="2459912" cy="1208974"/>
+      </dsp:txXfrm>
+    </dsp:sp>
+    <dsp:sp modelId="{27C32BB3-52CE-4B91-B6AA-76BC9C2E6FB1}">
+      <dsp:nvSpPr>
+        <dsp:cNvPr id="0" name=""/>
+        <dsp:cNvSpPr/>
+      </dsp:nvSpPr>
+      <dsp:spPr>
+        <a:xfrm>
+          <a:off x="5181600" y="1394027"/>
+          <a:ext cx="2535138" cy="1284200"/>
+        </a:xfrm>
+        <a:prstGeom prst="roundRect">
+          <a:avLst>
+            <a:gd name="adj" fmla="val 10000"/>
+          </a:avLst>
+        </a:prstGeom>
+        <a:solidFill>
+          <a:schemeClr val="accent1">
+            <a:hueOff val="0"/>
+            <a:satOff val="0"/>
+            <a:lumOff val="0"/>
+            <a:alphaOff val="0"/>
+          </a:schemeClr>
+        </a:solidFill>
+        <a:ln w="12700" cap="flat" cmpd="sng" algn="ctr">
+          <a:solidFill>
+            <a:schemeClr val="lt1">
+              <a:hueOff val="0"/>
+              <a:satOff val="0"/>
+              <a:lumOff val="0"/>
+              <a:alphaOff val="0"/>
+            </a:schemeClr>
+          </a:solidFill>
+          <a:prstDash val="solid"/>
+          <a:miter lim="800000"/>
+        </a:ln>
+        <a:effectLst/>
+      </dsp:spPr>
+      <dsp:style>
+        <a:lnRef idx="2">
+          <a:scrgbClr r="0" g="0" b="0"/>
+        </a:lnRef>
+        <a:fillRef idx="1">
+          <a:scrgbClr r="0" g="0" b="0"/>
+        </a:fillRef>
+        <a:effectRef idx="0">
+          <a:scrgbClr r="0" g="0" b="0"/>
+        </a:effectRef>
+        <a:fontRef idx="minor">
+          <a:schemeClr val="lt1"/>
+        </a:fontRef>
+      </dsp:style>
+      <dsp:txBody>
+        <a:bodyPr spcFirstLastPara="0" vert="horz" wrap="square" lIns="152400" tIns="152400" rIns="152400" bIns="152400" numCol="1" spcCol="1270" anchor="ctr" anchorCtr="0">
+          <a:noAutofit/>
+        </a:bodyPr>
+        <a:lstStyle/>
+        <a:p>
+          <a:pPr marL="0" lvl="0" indent="0" algn="ctr" defTabSz="1778000">
+            <a:lnSpc>
+              <a:spcPct val="90000"/>
+            </a:lnSpc>
+            <a:spcBef>
+              <a:spcPct val="0"/>
+            </a:spcBef>
+            <a:spcAft>
+              <a:spcPct val="35000"/>
+            </a:spcAft>
+            <a:buNone/>
+          </a:pPr>
+          <a:r>
+            <a:rPr lang="en-US" sz="4000" kern="1200" dirty="0" err="1"/>
+            <a:t>PolyCurve</a:t>
+          </a:r>
+          <a:endParaRPr lang="nl-NL" sz="4000" kern="1200" dirty="0"/>
+        </a:p>
+      </dsp:txBody>
+      <dsp:txXfrm>
+        <a:off x="5219213" y="1431640"/>
+        <a:ext cx="2459912" cy="1208974"/>
+      </dsp:txXfrm>
+    </dsp:sp>
+    <dsp:sp modelId="{272F9CC5-3CFF-4615-B734-DAA46D7F24BB}">
+      <dsp:nvSpPr>
+        <dsp:cNvPr id="0" name=""/>
+        <dsp:cNvSpPr/>
+      </dsp:nvSpPr>
+      <dsp:spPr>
+        <a:xfrm>
+          <a:off x="5181600" y="1154"/>
+          <a:ext cx="2535138" cy="1284200"/>
+        </a:xfrm>
+        <a:prstGeom prst="roundRect">
+          <a:avLst>
+            <a:gd name="adj" fmla="val 10000"/>
+          </a:avLst>
+        </a:prstGeom>
+        <a:solidFill>
+          <a:schemeClr val="accent1">
+            <a:hueOff val="0"/>
+            <a:satOff val="0"/>
+            <a:lumOff val="0"/>
+            <a:alphaOff val="0"/>
+          </a:schemeClr>
+        </a:solidFill>
+        <a:ln w="12700" cap="flat" cmpd="sng" algn="ctr">
+          <a:solidFill>
+            <a:schemeClr val="lt1">
+              <a:hueOff val="0"/>
+              <a:satOff val="0"/>
+              <a:lumOff val="0"/>
+              <a:alphaOff val="0"/>
+            </a:schemeClr>
+          </a:solidFill>
+          <a:prstDash val="solid"/>
+          <a:miter lim="800000"/>
+        </a:ln>
+        <a:effectLst/>
+      </dsp:spPr>
+      <dsp:style>
+        <a:lnRef idx="2">
+          <a:scrgbClr r="0" g="0" b="0"/>
+        </a:lnRef>
+        <a:fillRef idx="1">
+          <a:scrgbClr r="0" g="0" b="0"/>
+        </a:fillRef>
+        <a:effectRef idx="0">
+          <a:scrgbClr r="0" g="0" b="0"/>
+        </a:effectRef>
+        <a:fontRef idx="minor">
+          <a:schemeClr val="lt1"/>
+        </a:fontRef>
+      </dsp:style>
+      <dsp:txBody>
+        <a:bodyPr spcFirstLastPara="0" vert="horz" wrap="square" lIns="152400" tIns="152400" rIns="152400" bIns="152400" numCol="1" spcCol="1270" anchor="ctr" anchorCtr="0">
+          <a:noAutofit/>
+        </a:bodyPr>
+        <a:lstStyle/>
+        <a:p>
+          <a:pPr marL="0" lvl="0" indent="0" algn="ctr" defTabSz="1778000">
+            <a:lnSpc>
+              <a:spcPct val="90000"/>
+            </a:lnSpc>
+            <a:spcBef>
+              <a:spcPct val="0"/>
+            </a:spcBef>
+            <a:spcAft>
+              <a:spcPct val="35000"/>
+            </a:spcAft>
+            <a:buNone/>
+          </a:pPr>
+          <a:r>
+            <a:rPr lang="en-US" sz="4000" kern="1200" dirty="0"/>
+            <a:t>Polygon</a:t>
+          </a:r>
+          <a:endParaRPr lang="nl-NL" sz="4000" kern="1200" dirty="0"/>
+        </a:p>
+      </dsp:txBody>
+      <dsp:txXfrm>
+        <a:off x="5219213" y="38767"/>
+        <a:ext cx="2459912" cy="1208974"/>
+      </dsp:txXfrm>
+    </dsp:sp>
+    <dsp:sp modelId="{00A2F657-58A2-45E1-B128-E3A6F3CB1E00}">
+      <dsp:nvSpPr>
+        <dsp:cNvPr id="0" name=""/>
+        <dsp:cNvSpPr/>
+      </dsp:nvSpPr>
+      <dsp:spPr>
+        <a:xfrm>
+          <a:off x="7823214" y="2786899"/>
+          <a:ext cx="2535138" cy="1284200"/>
+        </a:xfrm>
+        <a:prstGeom prst="roundRect">
+          <a:avLst>
+            <a:gd name="adj" fmla="val 10000"/>
+          </a:avLst>
+        </a:prstGeom>
+        <a:solidFill>
+          <a:schemeClr val="accent1">
+            <a:hueOff val="0"/>
+            <a:satOff val="0"/>
+            <a:lumOff val="0"/>
+            <a:alphaOff val="0"/>
+          </a:schemeClr>
+        </a:solidFill>
+        <a:ln w="12700" cap="flat" cmpd="sng" algn="ctr">
+          <a:solidFill>
+            <a:schemeClr val="lt1">
+              <a:hueOff val="0"/>
+              <a:satOff val="0"/>
+              <a:lumOff val="0"/>
+              <a:alphaOff val="0"/>
+            </a:schemeClr>
+          </a:solidFill>
+          <a:prstDash val="solid"/>
+          <a:miter lim="800000"/>
+        </a:ln>
+        <a:effectLst/>
+      </dsp:spPr>
+      <dsp:style>
+        <a:lnRef idx="2">
+          <a:scrgbClr r="0" g="0" b="0"/>
+        </a:lnRef>
+        <a:fillRef idx="1">
+          <a:scrgbClr r="0" g="0" b="0"/>
+        </a:fillRef>
+        <a:effectRef idx="0">
+          <a:scrgbClr r="0" g="0" b="0"/>
+        </a:effectRef>
+        <a:fontRef idx="minor">
+          <a:schemeClr val="lt1"/>
+        </a:fontRef>
+      </dsp:style>
+      <dsp:txBody>
+        <a:bodyPr spcFirstLastPara="0" vert="horz" wrap="square" lIns="213360" tIns="213360" rIns="213360" bIns="213360" numCol="1" spcCol="1270" anchor="ctr" anchorCtr="0">
+          <a:noAutofit/>
+        </a:bodyPr>
+        <a:lstStyle/>
+        <a:p>
+          <a:pPr marL="0" lvl="0" indent="0" algn="ctr" defTabSz="2489200">
+            <a:lnSpc>
+              <a:spcPct val="90000"/>
+            </a:lnSpc>
+            <a:spcBef>
+              <a:spcPct val="0"/>
+            </a:spcBef>
+            <a:spcAft>
+              <a:spcPct val="35000"/>
+            </a:spcAft>
+            <a:buNone/>
+          </a:pPr>
+          <a:r>
+            <a:rPr lang="en-US" sz="5600" kern="1200" dirty="0"/>
+            <a:t>Color</a:t>
+          </a:r>
+          <a:endParaRPr lang="nl-NL" sz="5600" kern="1200" dirty="0"/>
+        </a:p>
+      </dsp:txBody>
+      <dsp:txXfrm>
+        <a:off x="7860827" y="2824512"/>
+        <a:ext cx="2459912" cy="1208974"/>
+      </dsp:txXfrm>
+    </dsp:sp>
+  </dsp:spTree>
+</dsp:drawing>
+</file>
+
+<file path=ppt/diagrams/layout1.xml><?xml version="1.0" encoding="utf-8"?>
+<dgm:layoutDef xmlns:dgm="http://schemas.openxmlformats.org/drawingml/2006/diagram" xmlns:a="http://schemas.openxmlformats.org/drawingml/2006/main" uniqueId="urn:microsoft.com/office/officeart/2005/8/layout/architecture">
+  <dgm:title val="Architecture Layout"/>
+  <dgm:desc val="Use to show hierarchical relationships that build from the bottom up. This layout works well for showing architectural components or objects that build on other objects."/>
+  <dgm:catLst>
+    <dgm:cat type="hierarchy" pri="4500"/>
+    <dgm:cat type="list" pri="24500"/>
+    <dgm:cat type="relationship" pri="10500"/>
+    <dgm:cat type="officeonline" pri="7000"/>
+  </dgm:catLst>
+  <dgm:sampData>
+    <dgm:dataModel>
+      <dgm:ptLst>
+        <dgm:pt modelId="0" type="doc"/>
+        <dgm:pt modelId="1">
+          <dgm:prSet phldr="1"/>
+        </dgm:pt>
+        <dgm:pt modelId="2">
+          <dgm:prSet phldr="1"/>
+        </dgm:pt>
+        <dgm:pt modelId="21">
+          <dgm:prSet phldr="1"/>
+        </dgm:pt>
+        <dgm:pt modelId="22">
+          <dgm:prSet phldr="1"/>
+        </dgm:pt>
+        <dgm:pt modelId="3">
+          <dgm:prSet phldr="1"/>
+        </dgm:pt>
+        <dgm:pt modelId="31">
+          <dgm:prSet phldr="1"/>
+        </dgm:pt>
+      </dgm:ptLst>
+      <dgm:cxnLst>
+        <dgm:cxn modelId="4" srcId="0" destId="1" srcOrd="0" destOrd="0"/>
+        <dgm:cxn modelId="5" srcId="1" destId="2" srcOrd="0" destOrd="0"/>
+        <dgm:cxn modelId="6" srcId="1" destId="3" srcOrd="1" destOrd="0"/>
+        <dgm:cxn modelId="23" srcId="2" destId="21" srcOrd="0" destOrd="0"/>
+        <dgm:cxn modelId="24" srcId="2" destId="22" srcOrd="1" destOrd="0"/>
+        <dgm:cxn modelId="33" srcId="3" destId="31" srcOrd="0" destOrd="0"/>
+      </dgm:cxnLst>
+      <dgm:bg/>
+      <dgm:whole/>
+    </dgm:dataModel>
+  </dgm:sampData>
+  <dgm:styleData>
+    <dgm:dataModel>
+      <dgm:ptLst>
+        <dgm:pt modelId="0" type="doc"/>
+        <dgm:pt modelId="1"/>
+        <dgm:pt modelId="11"/>
+        <dgm:pt modelId="12"/>
+      </dgm:ptLst>
+      <dgm:cxnLst>
+        <dgm:cxn modelId="2" srcId="0" destId="1" srcOrd="0" destOrd="0"/>
+        <dgm:cxn modelId="13" srcId="1" destId="11" srcOrd="0" destOrd="0"/>
+        <dgm:cxn modelId="14" srcId="1" destId="12" srcOrd="1" destOrd="0"/>
+      </dgm:cxnLst>
+      <dgm:bg/>
+      <dgm:whole/>
+    </dgm:dataModel>
+  </dgm:styleData>
+  <dgm:clrData>
+    <dgm:dataModel>
+      <dgm:ptLst>
+        <dgm:pt modelId="0" type="doc"/>
+        <dgm:pt modelId="1"/>
+        <dgm:pt modelId="2"/>
+        <dgm:pt modelId="21"/>
+        <dgm:pt modelId="211"/>
+        <dgm:pt modelId="3"/>
+        <dgm:pt modelId="31"/>
+        <dgm:pt modelId="311"/>
+      </dgm:ptLst>
+      <dgm:cxnLst>
+        <dgm:cxn modelId="4" srcId="0" destId="1" srcOrd="0" destOrd="0"/>
+        <dgm:cxn modelId="5" srcId="1" destId="2" srcOrd="0" destOrd="0"/>
+        <dgm:cxn modelId="6" srcId="1" destId="3" srcOrd="1" destOrd="0"/>
+        <dgm:cxn modelId="23" srcId="2" destId="21" srcOrd="0" destOrd="0"/>
+        <dgm:cxn modelId="24" srcId="21" destId="211" srcOrd="0" destOrd="0"/>
+        <dgm:cxn modelId="33" srcId="3" destId="31" srcOrd="0" destOrd="0"/>
+        <dgm:cxn modelId="34" srcId="31" destId="311" srcOrd="0" destOrd="0"/>
+      </dgm:cxnLst>
+      <dgm:bg/>
+      <dgm:whole/>
+    </dgm:dataModel>
+  </dgm:clrData>
+  <dgm:layoutNode name="Name0">
+    <dgm:varLst>
+      <dgm:chPref val="1"/>
+      <dgm:dir/>
+      <dgm:animOne val="branch"/>
+      <dgm:animLvl val="lvl"/>
+      <dgm:resizeHandles/>
+    </dgm:varLst>
+    <dgm:choose name="Name1">
+      <dgm:if name="Name2" func="var" arg="dir" op="equ" val="norm">
+        <dgm:alg type="lin">
+          <dgm:param type="linDir" val="fromL"/>
+          <dgm:param type="nodeVertAlign" val="b"/>
+        </dgm:alg>
+      </dgm:if>
+      <dgm:else name="Name3">
+        <dgm:alg type="lin">
+          <dgm:param type="linDir" val="fromR"/>
+          <dgm:param type="nodeVertAlign" val="b"/>
+        </dgm:alg>
+      </dgm:else>
+    </dgm:choose>
+    <dgm:shape xmlns:r="http://schemas.openxmlformats.org/officeDocument/2006/relationships" r:blip="">
+      <dgm:adjLst/>
+    </dgm:shape>
+    <dgm:presOf/>
+    <dgm:constrLst>
+      <dgm:constr type="w" for="ch" forName="vertOne" refType="w"/>
+      <dgm:constr type="w" for="des" forName="horzOne" refType="w"/>
+      <dgm:constr type="w" for="des" forName="txOne" refType="w"/>
+      <dgm:constr type="w" for="des" forName="vertTwo" refType="w"/>
+      <dgm:constr type="w" for="des" forName="horzTwo" refType="w"/>
+      <dgm:constr type="w" for="des" forName="txTwo" refType="w"/>
+      <dgm:constr type="w" for="des" forName="vertThree" refType="w"/>
+      <dgm:constr type="w" for="des" forName="horzThree" refType="w"/>
+      <dgm:constr type="w" for="des" forName="txThree" refType="w"/>
+      <dgm:constr type="w" for="des" forName="vertFour" refType="w"/>
+      <dgm:constr type="w" for="des" forName="horzFour" refType="w"/>
+      <dgm:constr type="w" for="des" forName="txFour" refType="w"/>
+      <dgm:constr type="h" for="des" ptType="node" op="equ"/>
+      <dgm:constr type="h" for="des" forName="txOne" refType="h"/>
+      <dgm:constr type="userH" for="des" ptType="node" refType="h" refFor="des" refForName="txOne"/>
+      <dgm:constr type="primFontSz" for="des" forName="txOne" val="65"/>
+      <dgm:constr type="primFontSz" for="des" forName="txTwo" val="65"/>
+      <dgm:constr type="primFontSz" for="des" forName="txTwo" refType="primFontSz" refFor="des" refForName="txOne" op="lte"/>
+      <dgm:constr type="primFontSz" for="des" forName="txThree" val="65"/>
+      <dgm:constr type="primFontSz" for="des" forName="txThree" refType="primFontSz" refFor="des" refForName="txOne" op="lte"/>
+      <dgm:constr type="primFontSz" for="des" forName="txThree" refType="primFontSz" refFor="des" refForName="txTwo" op="lte"/>
+      <dgm:constr type="primFontSz" for="des" forName="txFour" val="65"/>
+      <dgm:constr type="primFontSz" for="des" forName="txFour" refType="primFontSz" refFor="des" refForName="txOne" op="lte"/>
+      <dgm:constr type="primFontSz" for="des" forName="txFour" refType="primFontSz" refFor="des" refForName="txTwo" op="lte"/>
+      <dgm:constr type="primFontSz" for="des" forName="txFour" refType="primFontSz" refFor="des" refForName="txThree" op="lte"/>
+      <dgm:constr type="w" for="des" forName="sibSpaceOne" refType="w" fact="0.168"/>
+      <dgm:constr type="w" for="des" forName="sibSpaceTwo" refType="w" refFor="des" refForName="sibSpaceOne" op="equ" fact="0.5"/>
+      <dgm:constr type="w" for="des" forName="sibSpaceThree" refType="w" refFor="des" refForName="sibSpaceTwo" op="equ" fact="0.5"/>
+      <dgm:constr type="w" for="des" forName="sibSpaceFour" refType="w" refFor="des" refForName="sibSpaceThree" op="equ" fact="0.5"/>
+      <dgm:constr type="h" for="des" forName="parTransOne" refType="w" fact="0.056"/>
+      <dgm:constr type="h" for="des" forName="parTransTwo" refType="h" refFor="des" refForName="parTransOne" op="equ"/>
+      <dgm:constr type="h" for="des" forName="parTransThree" refType="h" refFor="des" refForName="parTransTwo" op="equ"/>
+      <dgm:constr type="h" for="des" forName="parTransFour" refType="h" refFor="des" refForName="parTransThree" op="equ"/>
+    </dgm:constrLst>
+    <dgm:ruleLst/>
+    <dgm:forEach name="Name4" axis="ch" ptType="node">
+      <dgm:layoutNode name="vertOne">
+        <dgm:alg type="lin">
+          <dgm:param type="linDir" val="fromB"/>
+        </dgm:alg>
+        <dgm:shape xmlns:r="http://schemas.openxmlformats.org/officeDocument/2006/relationships" r:blip="">
+          <dgm:adjLst/>
+        </dgm:shape>
+        <dgm:presOf/>
+        <dgm:constrLst>
+          <dgm:constr type="w" for="ch" forName="txOne" refType="w" refFor="ch" refForName="horzOne" op="gte"/>
+        </dgm:constrLst>
+        <dgm:ruleLst/>
+        <dgm:layoutNode name="txOne" styleLbl="node0">
+          <dgm:varLst>
+            <dgm:chPref val="3"/>
+          </dgm:varLst>
+          <dgm:alg type="tx"/>
+          <dgm:shape xmlns:r="http://schemas.openxmlformats.org/officeDocument/2006/relationships" type="roundRect" r:blip="">
+            <dgm:adjLst>
+              <dgm:adj idx="1" val="0.1"/>
+            </dgm:adjLst>
+          </dgm:shape>
+          <dgm:presOf axis="self"/>
+          <dgm:constrLst>
+            <dgm:constr type="tMarg" refType="primFontSz" fact="0.3"/>
+            <dgm:constr type="bMarg" refType="primFontSz" fact="0.3"/>
+            <dgm:constr type="lMarg" refType="primFontSz" fact="0.3"/>
+            <dgm:constr type="rMarg" refType="primFontSz" fact="0.3"/>
+          </dgm:constrLst>
+          <dgm:ruleLst>
+            <dgm:rule type="primFontSz" val="5" fact="NaN" max="NaN"/>
+          </dgm:ruleLst>
+        </dgm:layoutNode>
+        <dgm:choose name="Name5">
+          <dgm:if name="Name6" axis="des" ptType="node" func="cnt" op="gt" val="0">
+            <dgm:layoutNode name="parTransOne">
+              <dgm:alg type="sp"/>
+              <dgm:shape xmlns:r="http://schemas.openxmlformats.org/officeDocument/2006/relationships" r:blip="">
+                <dgm:adjLst/>
+              </dgm:shape>
+              <dgm:presOf/>
+              <dgm:constrLst/>
+              <dgm:ruleLst/>
+            </dgm:layoutNode>
+          </dgm:if>
+          <dgm:else name="Name7"/>
+        </dgm:choose>
+        <dgm:layoutNode name="horzOne">
+          <dgm:choose name="Name8">
+            <dgm:if name="Name9" func="var" arg="dir" op="equ" val="norm">
+              <dgm:alg type="lin">
+                <dgm:param type="linDir" val="fromL"/>
+                <dgm:param type="nodeVertAlign" val="b"/>
+              </dgm:alg>
+            </dgm:if>
+            <dgm:else name="Name10">
+              <dgm:alg type="lin">
+                <dgm:param type="linDir" val="fromR"/>
+                <dgm:param type="nodeVertAlign" val="b"/>
+              </dgm:alg>
+            </dgm:else>
+          </dgm:choose>
+          <dgm:shape xmlns:r="http://schemas.openxmlformats.org/officeDocument/2006/relationships" r:blip="">
+            <dgm:adjLst/>
+          </dgm:shape>
+          <dgm:presOf/>
+          <dgm:constrLst/>
+          <dgm:ruleLst>
+            <dgm:rule type="w" val="INF" fact="NaN" max="NaN"/>
+          </dgm:ruleLst>
+          <dgm:forEach name="Name11" axis="ch" ptType="node">
+            <dgm:layoutNode name="vertTwo">
+              <dgm:alg type="lin">
+                <dgm:param type="linDir" val="fromB"/>
+              </dgm:alg>
+              <dgm:shape xmlns:r="http://schemas.openxmlformats.org/officeDocument/2006/relationships" r:blip="">
+                <dgm:adjLst/>
+              </dgm:shape>
+              <dgm:presOf/>
+              <dgm:constrLst>
+                <dgm:constr type="w" for="ch" forName="txTwo" refType="w" refFor="ch" refForName="horzTwo" op="gte"/>
+              </dgm:constrLst>
+              <dgm:ruleLst/>
+              <dgm:layoutNode name="txTwo">
+                <dgm:varLst>
+                  <dgm:chPref val="3"/>
+                </dgm:varLst>
+                <dgm:alg type="tx"/>
+                <dgm:shape xmlns:r="http://schemas.openxmlformats.org/officeDocument/2006/relationships" type="roundRect" r:blip="">
+                  <dgm:adjLst>
+                    <dgm:adj idx="1" val="0.1"/>
+                  </dgm:adjLst>
+                </dgm:shape>
+                <dgm:presOf axis="self"/>
+                <dgm:constrLst>
+                  <dgm:constr type="userH"/>
+                  <dgm:constr type="h" refType="userH"/>
+                  <dgm:constr type="tMarg" refType="primFontSz" fact="0.3"/>
+                  <dgm:constr type="bMarg" refType="primFontSz" fact="0.3"/>
+                  <dgm:constr type="lMarg" refType="primFontSz" fact="0.3"/>
+                  <dgm:constr type="rMarg" refType="primFontSz" fact="0.3"/>
+                </dgm:constrLst>
+                <dgm:ruleLst>
+                  <dgm:rule type="primFontSz" val="5" fact="NaN" max="NaN"/>
+                </dgm:ruleLst>
+              </dgm:layoutNode>
+              <dgm:choose name="Name12">
+                <dgm:if name="Name13" axis="des" ptType="node" func="cnt" op="gt" val="0">
+                  <dgm:layoutNode name="parTransTwo">
+                    <dgm:alg type="sp"/>
+                    <dgm:shape xmlns:r="http://schemas.openxmlformats.org/officeDocument/2006/relationships" r:blip="">
+                      <dgm:adjLst/>
+                    </dgm:shape>
+                    <dgm:presOf/>
+                    <dgm:constrLst/>
+                    <dgm:ruleLst/>
+                  </dgm:layoutNode>
+                </dgm:if>
+                <dgm:else name="Name14"/>
+              </dgm:choose>
+              <dgm:layoutNode name="horzTwo">
+                <dgm:choose name="Name15">
+                  <dgm:if name="Name16" func="var" arg="dir" op="equ" val="norm">
+                    <dgm:alg type="lin">
+                      <dgm:param type="linDir" val="fromL"/>
+                      <dgm:param type="nodeVertAlign" val="b"/>
+                    </dgm:alg>
+                  </dgm:if>
+                  <dgm:else name="Name17">
+                    <dgm:alg type="lin">
+                      <dgm:param type="linDir" val="fromR"/>
+                      <dgm:param type="nodeVertAlign" val="b"/>
+                    </dgm:alg>
+                  </dgm:else>
+                </dgm:choose>
+                <dgm:shape xmlns:r="http://schemas.openxmlformats.org/officeDocument/2006/relationships" r:blip="">
+                  <dgm:adjLst/>
+                </dgm:shape>
+                <dgm:presOf/>
+                <dgm:constrLst/>
+                <dgm:ruleLst>
+                  <dgm:rule type="w" val="INF" fact="NaN" max="NaN"/>
+                </dgm:ruleLst>
+                <dgm:forEach name="Name18" axis="ch" ptType="node">
+                  <dgm:layoutNode name="vertThree">
+                    <dgm:alg type="lin">
+                      <dgm:param type="linDir" val="fromB"/>
+                    </dgm:alg>
+                    <dgm:shape xmlns:r="http://schemas.openxmlformats.org/officeDocument/2006/relationships" r:blip="">
+                      <dgm:adjLst/>
+                    </dgm:shape>
+                    <dgm:presOf/>
+                    <dgm:constrLst>
+                      <dgm:constr type="w" for="ch" forName="txThree" refType="w" refFor="ch" refForName="horzThree" op="gte"/>
+                    </dgm:constrLst>
+                    <dgm:ruleLst/>
+                    <dgm:layoutNode name="txThree">
+                      <dgm:varLst>
+                        <dgm:chPref val="3"/>
+                      </dgm:varLst>
+                      <dgm:alg type="tx"/>
+                      <dgm:shape xmlns:r="http://schemas.openxmlformats.org/officeDocument/2006/relationships" type="roundRect" r:blip="">
+                        <dgm:adjLst>
+                          <dgm:adj idx="1" val="0.1"/>
+                        </dgm:adjLst>
+                      </dgm:shape>
+                      <dgm:presOf axis="self"/>
+                      <dgm:constrLst>
+                        <dgm:constr type="userH"/>
+                        <dgm:constr type="h" refType="userH"/>
+                        <dgm:constr type="tMarg" refType="primFontSz" fact="0.3"/>
+                        <dgm:constr type="bMarg" refType="primFontSz" fact="0.3"/>
+                        <dgm:constr type="lMarg" refType="primFontSz" fact="0.3"/>
+                        <dgm:constr type="rMarg" refType="primFontSz" fact="0.3"/>
+                      </dgm:constrLst>
+                      <dgm:ruleLst>
+                        <dgm:rule type="primFontSz" val="5" fact="NaN" max="NaN"/>
+                      </dgm:ruleLst>
+                    </dgm:layoutNode>
+                    <dgm:choose name="Name19">
+                      <dgm:if name="Name20" axis="des" ptType="node" func="cnt" op="gt" val="0">
+                        <dgm:layoutNode name="parTransThree">
+                          <dgm:alg type="sp"/>
+                          <dgm:shape xmlns:r="http://schemas.openxmlformats.org/officeDocument/2006/relationships" r:blip="">
+                            <dgm:adjLst/>
+                          </dgm:shape>
+                          <dgm:presOf/>
+                          <dgm:constrLst/>
+                          <dgm:ruleLst/>
+                        </dgm:layoutNode>
+                      </dgm:if>
+                      <dgm:else name="Name21"/>
+                    </dgm:choose>
+                    <dgm:layoutNode name="horzThree">
+                      <dgm:choose name="Name22">
+                        <dgm:if name="Name23" func="var" arg="dir" op="equ" val="norm">
+                          <dgm:alg type="lin">
+                            <dgm:param type="linDir" val="fromL"/>
+                            <dgm:param type="nodeVertAlign" val="b"/>
+                          </dgm:alg>
+                        </dgm:if>
+                        <dgm:else name="Name24">
+                          <dgm:alg type="lin">
+                            <dgm:param type="linDir" val="fromR"/>
+                            <dgm:param type="nodeVertAlign" val="b"/>
+                          </dgm:alg>
+                        </dgm:else>
+                      </dgm:choose>
+                      <dgm:shape xmlns:r="http://schemas.openxmlformats.org/officeDocument/2006/relationships" r:blip="">
+                        <dgm:adjLst/>
+                      </dgm:shape>
+                      <dgm:presOf/>
+                      <dgm:constrLst/>
+                      <dgm:ruleLst>
+                        <dgm:rule type="w" val="INF" fact="NaN" max="NaN"/>
+                      </dgm:ruleLst>
+                      <dgm:forEach name="repeat" axis="ch" ptType="node">
+                        <dgm:layoutNode name="vertFour">
+                          <dgm:varLst>
+                            <dgm:chPref val="3"/>
+                          </dgm:varLst>
+                          <dgm:alg type="lin">
+                            <dgm:param type="linDir" val="fromB"/>
+                          </dgm:alg>
+                          <dgm:shape xmlns:r="http://schemas.openxmlformats.org/officeDocument/2006/relationships" r:blip="">
+                            <dgm:adjLst/>
+                          </dgm:shape>
+                          <dgm:presOf/>
+                          <dgm:constrLst>
+                            <dgm:constr type="w" for="ch" forName="txFour" refType="w" refFor="ch" refForName="horzFour" op="gte"/>
+                          </dgm:constrLst>
+                          <dgm:ruleLst/>
+                          <dgm:layoutNode name="txFour">
+                            <dgm:varLst>
+                              <dgm:chPref val="3"/>
+                            </dgm:varLst>
+                            <dgm:alg type="tx"/>
+                            <dgm:shape xmlns:r="http://schemas.openxmlformats.org/officeDocument/2006/relationships" type="roundRect" r:blip="">
+                              <dgm:adjLst>
+                                <dgm:adj idx="1" val="0.1"/>
+                              </dgm:adjLst>
+                            </dgm:shape>
+                            <dgm:presOf axis="self"/>
+                            <dgm:constrLst>
+                              <dgm:constr type="userH"/>
+                              <dgm:constr type="h" refType="userH"/>
+                              <dgm:constr type="tMarg" refType="primFontSz" fact="0.3"/>
+                              <dgm:constr type="bMarg" refType="primFontSz" fact="0.3"/>
+                              <dgm:constr type="lMarg" refType="primFontSz" fact="0.3"/>
+                              <dgm:constr type="rMarg" refType="primFontSz" fact="0.3"/>
+                            </dgm:constrLst>
+                            <dgm:ruleLst>
+                              <dgm:rule type="primFontSz" val="5" fact="NaN" max="NaN"/>
+                            </dgm:ruleLst>
+                          </dgm:layoutNode>
+                          <dgm:choose name="Name25">
+                            <dgm:if name="Name26" axis="des" ptType="node" func="cnt" op="gt" val="0">
+                              <dgm:layoutNode name="parTransFour">
+                                <dgm:alg type="sp"/>
+                                <dgm:shape xmlns:r="http://schemas.openxmlformats.org/officeDocument/2006/relationships" r:blip="">
+                                  <dgm:adjLst/>
+                                </dgm:shape>
+                                <dgm:presOf/>
+                                <dgm:constrLst/>
+                                <dgm:ruleLst/>
+                              </dgm:layoutNode>
+                            </dgm:if>
+                            <dgm:else name="Name27"/>
+                          </dgm:choose>
+                          <dgm:layoutNode name="horzFour">
+                            <dgm:choose name="Name28">
+                              <dgm:if name="Name29" func="var" arg="dir" op="equ" val="norm">
+                                <dgm:alg type="lin">
+                                  <dgm:param type="linDir" val="fromL"/>
+                                  <dgm:param type="nodeVertAlign" val="b"/>
+                                </dgm:alg>
+                              </dgm:if>
+                              <dgm:else name="Name30">
+                                <dgm:alg type="lin">
+                                  <dgm:param type="linDir" val="fromR"/>
+                                  <dgm:param type="nodeVertAlign" val="b"/>
+                                </dgm:alg>
+                              </dgm:else>
+                            </dgm:choose>
+                            <dgm:shape xmlns:r="http://schemas.openxmlformats.org/officeDocument/2006/relationships" r:blip="">
+                              <dgm:adjLst/>
+                            </dgm:shape>
+                            <dgm:presOf/>
+                            <dgm:constrLst/>
+                            <dgm:ruleLst>
+                              <dgm:rule type="w" val="INF" fact="NaN" max="NaN"/>
+                            </dgm:ruleLst>
+                            <dgm:forEach name="Name31" ref="repeat"/>
+                          </dgm:layoutNode>
+                        </dgm:layoutNode>
+                        <dgm:choose name="Name32">
+                          <dgm:if name="Name33" axis="self" ptType="node" func="revPos" op="gte" val="2">
+                            <dgm:forEach name="Name34" axis="followSib" ptType="sibTrans" cnt="1">
+                              <dgm:layoutNode name="sibSpaceFour">
+                                <dgm:alg type="sp"/>
+                                <dgm:shape xmlns:r="http://schemas.openxmlformats.org/officeDocument/2006/relationships" r:blip="">
+                                  <dgm:adjLst/>
+                                </dgm:shape>
+                                <dgm:presOf/>
+                                <dgm:constrLst/>
+                                <dgm:ruleLst/>
+                              </dgm:layoutNode>
+                            </dgm:forEach>
+                          </dgm:if>
+                          <dgm:else name="Name35"/>
+                        </dgm:choose>
+                      </dgm:forEach>
+                    </dgm:layoutNode>
+                  </dgm:layoutNode>
+                  <dgm:choose name="Name36">
+                    <dgm:if name="Name37" axis="self" ptType="node" func="revPos" op="gte" val="2">
+                      <dgm:forEach name="Name38" axis="followSib" ptType="sibTrans" cnt="1">
+                        <dgm:layoutNode name="sibSpaceThree">
+                          <dgm:alg type="sp"/>
+                          <dgm:shape xmlns:r="http://schemas.openxmlformats.org/officeDocument/2006/relationships" r:blip="">
+                            <dgm:adjLst/>
+                          </dgm:shape>
+                          <dgm:presOf/>
+                          <dgm:constrLst/>
+                          <dgm:ruleLst/>
+                        </dgm:layoutNode>
+                      </dgm:forEach>
+                    </dgm:if>
+                    <dgm:else name="Name39"/>
+                  </dgm:choose>
+                </dgm:forEach>
+              </dgm:layoutNode>
+            </dgm:layoutNode>
+            <dgm:choose name="Name40">
+              <dgm:if name="Name41" axis="self" ptType="node" func="revPos" op="gte" val="2">
+                <dgm:forEach name="Name42" axis="followSib" ptType="sibTrans" cnt="1">
+                  <dgm:layoutNode name="sibSpaceTwo">
+                    <dgm:alg type="sp"/>
+                    <dgm:shape xmlns:r="http://schemas.openxmlformats.org/officeDocument/2006/relationships" r:blip="">
+                      <dgm:adjLst/>
+                    </dgm:shape>
+                    <dgm:presOf/>
+                    <dgm:constrLst/>
+                    <dgm:ruleLst/>
+                  </dgm:layoutNode>
+                </dgm:forEach>
+              </dgm:if>
+              <dgm:else name="Name43"/>
+            </dgm:choose>
+          </dgm:forEach>
+        </dgm:layoutNode>
+      </dgm:layoutNode>
+      <dgm:choose name="Name44">
+        <dgm:if name="Name45" axis="self" ptType="node" func="revPos" op="gte" val="2">
+          <dgm:forEach name="Name46" axis="followSib" ptType="sibTrans" cnt="1">
+            <dgm:layoutNode name="sibSpaceOne">
+              <dgm:alg type="sp"/>
+              <dgm:shape xmlns:r="http://schemas.openxmlformats.org/officeDocument/2006/relationships" r:blip="">
+                <dgm:adjLst/>
+              </dgm:shape>
+              <dgm:presOf/>
+              <dgm:constrLst/>
+              <dgm:ruleLst/>
+            </dgm:layoutNode>
+          </dgm:forEach>
+        </dgm:if>
+        <dgm:else name="Name47"/>
+      </dgm:choose>
+    </dgm:forEach>
+  </dgm:layoutNode>
+</dgm:layoutDef>
+</file>
+
+<file path=ppt/diagrams/quickStyle1.xml><?xml version="1.0" encoding="utf-8"?>
+<dgm:styleDef xmlns:dgm="http://schemas.openxmlformats.org/drawingml/2006/diagram" xmlns:a="http://schemas.openxmlformats.org/drawingml/2006/main" uniqueId="urn:microsoft.com/office/officeart/2005/8/quickstyle/simple1">
+  <dgm:title val=""/>
+  <dgm:desc val=""/>
+  <dgm:catLst>
+    <dgm:cat type="simple" pri="10100"/>
+  </dgm:catLst>
+  <dgm:scene3d>
+    <a:camera prst="orthographicFront"/>
+    <a:lightRig rig="threePt" dir="t"/>
+  </dgm:scene3d>
+  <dgm:styleLbl name="node0">
+    <dgm:scene3d>
+      <a:camera prst="orthographicFront"/>
+      <a:lightRig rig="threePt" dir="t"/>
+    </dgm:scene3d>
+    <dgm:sp3d/>
+    <dgm:txPr/>
+    <dgm:style>
+      <a:lnRef idx="2">
+        <a:scrgbClr r="0" g="0" b="0"/>
+      </a:lnRef>
+      <a:fillRef idx="1">
+        <a:scrgbClr r="0" g="0" b="0"/>
+      </a:fillRef>
+      <a:effectRef idx="0">
+        <a:scrgbClr r="0" g="0" b="0"/>
+      </a:effectRef>
+      <a:fontRef idx="minor">
+        <a:schemeClr val="lt1"/>
+      </a:fontRef>
+    </dgm:style>
+  </dgm:styleLbl>
+  <dgm:styleLbl name="lnNode1">
+    <dgm:scene3d>
+      <a:camera prst="orthographicFront"/>
+      <a:lightRig rig="threePt" dir="t"/>
+    </dgm:scene3d>
+    <dgm:sp3d/>
+    <dgm:txPr/>
+    <dgm:style>
+      <a:lnRef idx="2">
+        <a:scrgbClr r="0" g="0" b="0"/>
+      </a:lnRef>
+      <a:fillRef idx="1">
+        <a:scrgbClr r="0" g="0" b="0"/>
+      </a:fillRef>
+      <a:effectRef idx="0">
+        <a:scrgbClr r="0" g="0" b="0"/>
+      </a:effectRef>
+      <a:fontRef idx="minor">
+        <a:schemeClr val="lt1"/>
+      </a:fontRef>
+    </dgm:style>
+  </dgm:styleLbl>
+  <dgm:styleLbl name="vennNode1">
+    <dgm:scene3d>
+      <a:camera prst="orthographicFront"/>
+      <a:lightRig rig="threePt" dir="t"/>
+    </dgm:scene3d>
+    <dgm:sp3d/>
+    <dgm:txPr/>
+    <dgm:style>
+      <a:lnRef idx="2">
+        <a:scrgbClr r="0" g="0" b="0"/>
+      </a:lnRef>
+      <a:fillRef idx="1">
+        <a:scrgbClr r="0" g="0" b="0"/>
+      </a:fillRef>
+      <a:effectRef idx="0">
+        <a:scrgbClr r="0" g="0" b="0"/>
+      </a:effectRef>
+      <a:fontRef idx="minor">
+        <a:schemeClr val="tx1"/>
+      </a:fontRef>
+    </dgm:style>
+  </dgm:styleLbl>
+  <dgm:styleLbl name="alignNode1">
+    <dgm:scene3d>
+      <a:camera prst="orthographicFront"/>
+      <a:lightRig rig="threePt" dir="t"/>
+    </dgm:scene3d>
+    <dgm:sp3d/>
+    <dgm:txPr/>
+    <dgm:style>
+      <a:lnRef idx="2">
+        <a:scrgbClr r="0" g="0" b="0"/>
+      </a:lnRef>
+      <a:fillRef idx="1">
+        <a:scrgbClr r="0" g="0" b="0"/>
+      </a:fillRef>
+      <a:effectRef idx="0">
+        <a:scrgbClr r="0" g="0" b="0"/>
+      </a:effectRef>
+      <a:fontRef idx="minor">
+        <a:schemeClr val="lt1"/>
+      </a:fontRef>
+    </dgm:style>
+  </dgm:styleLbl>
+  <dgm:styleLbl name="node1">
+    <dgm:scene3d>
+      <a:camera prst="orthographicFront"/>
+      <a:lightRig rig="threePt" dir="t"/>
+    </dgm:scene3d>
+    <dgm:sp3d/>
+    <dgm:txPr/>
+    <dgm:style>
+      <a:lnRef idx="2">
+        <a:scrgbClr r="0" g="0" b="0"/>
+      </a:lnRef>
+      <a:fillRef idx="1">
+        <a:scrgbClr r="0" g="0" b="0"/>
+      </a:fillRef>
+      <a:effectRef idx="0">
+        <a:scrgbClr r="0" g="0" b="0"/>
+      </a:effectRef>
+      <a:fontRef idx="minor">
+        <a:schemeClr val="lt1"/>
+      </a:fontRef>
+    </dgm:style>
+  </dgm:styleLbl>
+  <dgm:styleLbl name="node2">
+    <dgm:scene3d>
+      <a:camera prst="orthographicFront"/>
+      <a:lightRig rig="threePt" dir="t"/>
+    </dgm:scene3d>
+    <dgm:sp3d/>
+    <dgm:txPr/>
+    <dgm:style>
+      <a:lnRef idx="2">
+        <a:scrgbClr r="0" g="0" b="0"/>
+      </a:lnRef>
+      <a:fillRef idx="1">
+        <a:scrgbClr r="0" g="0" b="0"/>
+      </a:fillRef>
+      <a:effectRef idx="0">
+        <a:scrgbClr r="0" g="0" b="0"/>
+      </a:effectRef>
+      <a:fontRef idx="minor">
+        <a:schemeClr val="lt1"/>
+      </a:fontRef>
+    </dgm:style>
+  </dgm:styleLbl>
+  <dgm:styleLbl name="node3">
+    <dgm:scene3d>
+      <a:camera prst="orthographicFront"/>
+      <a:lightRig rig="threePt" dir="t"/>
+    </dgm:scene3d>
+    <dgm:sp3d/>
+    <dgm:txPr/>
+    <dgm:style>
+      <a:lnRef idx="2">
+        <a:scrgbClr r="0" g="0" b="0"/>
+      </a:lnRef>
+      <a:fillRef idx="1">
+        <a:scrgbClr r="0" g="0" b="0"/>
+      </a:fillRef>
+      <a:effectRef idx="0">
+        <a:scrgbClr r="0" g="0" b="0"/>
+      </a:effectRef>
+      <a:fontRef idx="minor">
+        <a:schemeClr val="lt1"/>
+      </a:fontRef>
+    </dgm:style>
+  </dgm:styleLbl>
+  <dgm:styleLbl name="node4">
+    <dgm:scene3d>
+      <a:camera prst="orthographicFront"/>
+      <a:lightRig rig="threePt" dir="t"/>
+    </dgm:scene3d>
+    <dgm:sp3d/>
+    <dgm:txPr/>
+    <dgm:style>
+      <a:lnRef idx="2">
+        <a:scrgbClr r="0" g="0" b="0"/>
+      </a:lnRef>
+      <a:fillRef idx="1">
+        <a:scrgbClr r="0" g="0" b="0"/>
+      </a:fillRef>
+      <a:effectRef idx="0">
+        <a:scrgbClr r="0" g="0" b="0"/>
+      </a:effectRef>
+      <a:fontRef idx="minor">
+        <a:schemeClr val="lt1"/>
+      </a:fontRef>
+    </dgm:style>
+  </dgm:styleLbl>
+  <dgm:styleLbl name="fgImgPlace1">
+    <dgm:scene3d>
+      <a:camera prst="orthographicFront"/>
+      <a:lightRig rig="threePt" dir="t"/>
+    </dgm:scene3d>
+    <dgm:sp3d/>
+    <dgm:txPr/>
+    <dgm:style>
+      <a:lnRef idx="2">
+        <a:scrgbClr r="0" g="0" b="0"/>
+      </a:lnRef>
+      <a:fillRef idx="1">
+        <a:scrgbClr r="0" g="0" b="0"/>
+      </a:fillRef>
+      <a:effectRef idx="0">
+        <a:scrgbClr r="0" g="0" b="0"/>
+      </a:effectRef>
+      <a:fontRef idx="minor"/>
+    </dgm:style>
+  </dgm:styleLbl>
+  <dgm:styleLbl name="alignImgPlace1">
+    <dgm:scene3d>
+      <a:camera prst="orthographicFront"/>
+      <a:lightRig rig="threePt" dir="t"/>
+    </dgm:scene3d>
+    <dgm:sp3d/>
+    <dgm:txPr/>
+    <dgm:style>
+      <a:lnRef idx="2">
+        <a:scrgbClr r="0" g="0" b="0"/>
+      </a:lnRef>
+      <a:fillRef idx="1">
+        <a:scrgbClr r="0" g="0" b="0"/>
+      </a:fillRef>
+      <a:effectRef idx="0">
+        <a:scrgbClr r="0" g="0" b="0"/>
+      </a:effectRef>
+      <a:fontRef idx="minor"/>
+    </dgm:style>
+  </dgm:styleLbl>
+  <dgm:styleLbl name="bgImgPlace1">
+    <dgm:scene3d>
+      <a:camera prst="orthographicFront"/>
+      <a:lightRig rig="threePt" dir="t"/>
+    </dgm:scene3d>
+    <dgm:sp3d/>
+    <dgm:txPr/>
+    <dgm:style>
+      <a:lnRef idx="2">
+        <a:scrgbClr r="0" g="0" b="0"/>
+      </a:lnRef>
+      <a:fillRef idx="1">
+        <a:scrgbClr r="0" g="0" b="0"/>
+      </a:fillRef>
+      <a:effectRef idx="0">
+        <a:scrgbClr r="0" g="0" b="0"/>
+      </a:effectRef>
+      <a:fontRef idx="minor"/>
+    </dgm:style>
+  </dgm:styleLbl>
+  <dgm:styleLbl name="sibTrans2D1">
+    <dgm:scene3d>
+      <a:camera prst="orthographicFront"/>
+      <a:lightRig rig="threePt" dir="t"/>
+    </dgm:scene3d>
+    <dgm:sp3d/>
+    <dgm:txPr/>
+    <dgm:style>
+      <a:lnRef idx="0">
+        <a:scrgbClr r="0" g="0" b="0"/>
+      </a:lnRef>
+      <a:fillRef idx="1">
+        <a:scrgbClr r="0" g="0" b="0"/>
+      </a:fillRef>
+      <a:effectRef idx="0">
+        <a:scrgbClr r="0" g="0" b="0"/>
+      </a:effectRef>
+      <a:fontRef idx="minor">
+        <a:schemeClr val="lt1"/>
+      </a:fontRef>
+    </dgm:style>
+  </dgm:styleLbl>
+  <dgm:styleLbl name="fgSibTrans2D1">
+    <dgm:scene3d>
+      <a:camera prst="orthographicFront"/>
+      <a:lightRig rig="threePt" dir="t"/>
+    </dgm:scene3d>
+    <dgm:sp3d/>
+    <dgm:txPr/>
+    <dgm:style>
+      <a:lnRef idx="0">
+        <a:scrgbClr r="0" g="0" b="0"/>
+      </a:lnRef>
+      <a:fillRef idx="1">
+        <a:scrgbClr r="0" g="0" b="0"/>
+      </a:fillRef>
+      <a:effectRef idx="0">
+        <a:scrgbClr r="0" g="0" b="0"/>
+      </a:effectRef>
+      <a:fontRef idx="minor">
+        <a:schemeClr val="lt1"/>
+      </a:fontRef>
+    </dgm:style>
+  </dgm:styleLbl>
+  <dgm:styleLbl name="bgSibTrans2D1">
+    <dgm:scene3d>
+      <a:camera prst="orthographicFront"/>
+      <a:lightRig rig="threePt" dir="t"/>
+    </dgm:scene3d>
+    <dgm:sp3d/>
+    <dgm:txPr/>
+    <dgm:style>
+      <a:lnRef idx="0">
+        <a:scrgbClr r="0" g="0" b="0"/>
+      </a:lnRef>
+      <a:fillRef idx="1">
+        <a:scrgbClr r="0" g="0" b="0"/>
+      </a:fillRef>
+      <a:effectRef idx="0">
+        <a:scrgbClr r="0" g="0" b="0"/>
+      </a:effectRef>
+      <a:fontRef idx="minor">
+        <a:schemeClr val="lt1"/>
+      </a:fontRef>
+    </dgm:style>
+  </dgm:styleLbl>
+  <dgm:styleLbl name="sibTrans1D1">
+    <dgm:scene3d>
+      <a:camera prst="orthographicFront"/>
+      <a:lightRig rig="threePt" dir="t"/>
+    </dgm:scene3d>
+    <dgm:sp3d/>
+    <dgm:txPr/>
+    <dgm:style>
+      <a:lnRef idx="1">
+        <a:scrgbClr r="0" g="0" b="0"/>
+      </a:lnRef>
+      <a:fillRef idx="0">
+        <a:scrgbClr r="0" g="0" b="0"/>
+      </a:fillRef>
+      <a:effectRef idx="0">
+        <a:scrgbClr r="0" g="0" b="0"/>
+      </a:effectRef>
+      <a:fontRef idx="minor"/>
+    </dgm:style>
+  </dgm:styleLbl>
+  <dgm:styleLbl name="callout">
+    <dgm:scene3d>
+      <a:camera prst="orthographicFront"/>
+      <a:lightRig rig="threePt" dir="t"/>
+    </dgm:scene3d>
+    <dgm:sp3d/>
+    <dgm:txPr/>
+    <dgm:style>
+      <a:lnRef idx="2">
+        <a:scrgbClr r="0" g="0" b="0"/>
+      </a:lnRef>
+      <a:fillRef idx="1">
+        <a:scrgbClr r="0" g="0" b="0"/>
+      </a:fillRef>
+      <a:effectRef idx="0">
+        <a:scrgbClr r="0" g="0" b="0"/>
+      </a:effectRef>
+      <a:fontRef idx="minor"/>
+    </dgm:style>
+  </dgm:styleLbl>
+  <dgm:styleLbl name="asst0">
+    <dgm:scene3d>
+      <a:camera prst="orthographicFront"/>
+      <a:lightRig rig="threePt" dir="t"/>
+    </dgm:scene3d>
+    <dgm:sp3d/>
+    <dgm:txPr/>
+    <dgm:style>
+      <a:lnRef idx="2">
+        <a:scrgbClr r="0" g="0" b="0"/>
+      </a:lnRef>
+      <a:fillRef idx="1">
+        <a:scrgbClr r="0" g="0" b="0"/>
+      </a:fillRef>
+      <a:effectRef idx="0">
+        <a:scrgbClr r="0" g="0" b="0"/>
+      </a:effectRef>
+      <a:fontRef idx="minor">
+        <a:schemeClr val="lt1"/>
+      </a:fontRef>
+    </dgm:style>
+  </dgm:styleLbl>
+  <dgm:styleLbl name="asst1">
+    <dgm:scene3d>
+      <a:camera prst="orthographicFront"/>
+      <a:lightRig rig="threePt" dir="t"/>
+    </dgm:scene3d>
+    <dgm:sp3d/>
+    <dgm:txPr/>
+    <dgm:style>
+      <a:lnRef idx="2">
+        <a:scrgbClr r="0" g="0" b="0"/>
+      </a:lnRef>
+      <a:fillRef idx="1">
+        <a:scrgbClr r="0" g="0" b="0"/>
+      </a:fillRef>
+      <a:effectRef idx="0">
+        <a:scrgbClr r="0" g="0" b="0"/>
+      </a:effectRef>
+      <a:fontRef idx="minor">
+        <a:schemeClr val="lt1"/>
+      </a:fontRef>
+    </dgm:style>
+  </dgm:styleLbl>
+  <dgm:styleLbl name="asst2">
+    <dgm:scene3d>
+      <a:camera prst="orthographicFront"/>
+      <a:lightRig rig="threePt" dir="t"/>
+    </dgm:scene3d>
+    <dgm:sp3d/>
+    <dgm:txPr/>
+    <dgm:style>
+      <a:lnRef idx="2">
+        <a:scrgbClr r="0" g="0" b="0"/>
+      </a:lnRef>
+      <a:fillRef idx="1">
+        <a:scrgbClr r="0" g="0" b="0"/>
+      </a:fillRef>
+      <a:effectRef idx="0">
+        <a:scrgbClr r="0" g="0" b="0"/>
+      </a:effectRef>
+      <a:fontRef idx="minor">
+        <a:schemeClr val="lt1"/>
+      </a:fontRef>
+    </dgm:style>
+  </dgm:styleLbl>
+  <dgm:styleLbl name="asst3">
+    <dgm:scene3d>
+      <a:camera prst="orthographicFront"/>
+      <a:lightRig rig="threePt" dir="t"/>
+    </dgm:scene3d>
+    <dgm:sp3d/>
+    <dgm:txPr/>
+    <dgm:style>
+      <a:lnRef idx="2">
+        <a:scrgbClr r="0" g="0" b="0"/>
+      </a:lnRef>
+      <a:fillRef idx="1">
+        <a:scrgbClr r="0" g="0" b="0"/>
+      </a:fillRef>
+      <a:effectRef idx="0">
+        <a:scrgbClr r="0" g="0" b="0"/>
+      </a:effectRef>
+      <a:fontRef idx="minor">
+        <a:schemeClr val="lt1"/>
+      </a:fontRef>
+    </dgm:style>
+  </dgm:styleLbl>
+  <dgm:styleLbl name="asst4">
+    <dgm:scene3d>
+      <a:camera prst="orthographicFront"/>
+      <a:lightRig rig="threePt" dir="t"/>
+    </dgm:scene3d>
+    <dgm:sp3d/>
+    <dgm:txPr/>
+    <dgm:style>
+      <a:lnRef idx="2">
+        <a:scrgbClr r="0" g="0" b="0"/>
+      </a:lnRef>
+      <a:fillRef idx="1">
+        <a:scrgbClr r="0" g="0" b="0"/>
+      </a:fillRef>
+      <a:effectRef idx="0">
+        <a:scrgbClr r="0" g="0" b="0"/>
+      </a:effectRef>
+      <a:fontRef idx="minor">
+        <a:schemeClr val="lt1"/>
+      </a:fontRef>
+    </dgm:style>
+  </dgm:styleLbl>
+  <dgm:styleLbl name="parChTrans2D1">
+    <dgm:scene3d>
+      <a:camera prst="orthographicFront"/>
+      <a:lightRig rig="threePt" dir="t"/>
+    </dgm:scene3d>
+    <dgm:sp3d/>
+    <dgm:txPr/>
+    <dgm:style>
+      <a:lnRef idx="2">
+        <a:scrgbClr r="0" g="0" b="0"/>
+      </a:lnRef>
+      <a:fillRef idx="1">
+        <a:scrgbClr r="0" g="0" b="0"/>
+      </a:fillRef>
+      <a:effectRef idx="0">
+        <a:scrgbClr r="0" g="0" b="0"/>
+      </a:effectRef>
+      <a:fontRef idx="minor">
+        <a:schemeClr val="lt1"/>
+      </a:fontRef>
+    </dgm:style>
+  </dgm:styleLbl>
+  <dgm:styleLbl name="parChTrans2D2">
+    <dgm:scene3d>
+      <a:camera prst="orthographicFront"/>
+      <a:lightRig rig="threePt" dir="t"/>
+    </dgm:scene3d>
+    <dgm:sp3d/>
+    <dgm:txPr/>
+    <dgm:style>
+      <a:lnRef idx="2">
+        <a:scrgbClr r="0" g="0" b="0"/>
+      </a:lnRef>
+      <a:fillRef idx="1">
+        <a:scrgbClr r="0" g="0" b="0"/>
+      </a:fillRef>
+      <a:effectRef idx="0">
+        <a:scrgbClr r="0" g="0" b="0"/>
+      </a:effectRef>
+      <a:fontRef idx="minor">
+        <a:schemeClr val="lt1"/>
+      </a:fontRef>
+    </dgm:style>
+  </dgm:styleLbl>
+  <dgm:styleLbl name="parChTrans2D3">
+    <dgm:scene3d>
+      <a:camera prst="orthographicFront"/>
+      <a:lightRig rig="threePt" dir="t"/>
+    </dgm:scene3d>
+    <dgm:sp3d/>
+    <dgm:txPr/>
+    <dgm:style>
+      <a:lnRef idx="2">
+        <a:scrgbClr r="0" g="0" b="0"/>
+      </a:lnRef>
+      <a:fillRef idx="1">
+        <a:scrgbClr r="0" g="0" b="0"/>
+      </a:fillRef>
+      <a:effectRef idx="0">
+        <a:scrgbClr r="0" g="0" b="0"/>
+      </a:effectRef>
+      <a:fontRef idx="minor">
+        <a:schemeClr val="lt1"/>
+      </a:fontRef>
+    </dgm:style>
+  </dgm:styleLbl>
+  <dgm:styleLbl name="parChTrans2D4">
+    <dgm:scene3d>
+      <a:camera prst="orthographicFront"/>
+      <a:lightRig rig="threePt" dir="t"/>
+    </dgm:scene3d>
+    <dgm:sp3d/>
+    <dgm:txPr/>
+    <dgm:style>
+      <a:lnRef idx="2">
+        <a:scrgbClr r="0" g="0" b="0"/>
+      </a:lnRef>
+      <a:fillRef idx="1">
+        <a:scrgbClr r="0" g="0" b="0"/>
+      </a:fillRef>
+      <a:effectRef idx="0">
+        <a:scrgbClr r="0" g="0" b="0"/>
+      </a:effectRef>
+      <a:fontRef idx="minor">
+        <a:schemeClr val="lt1"/>
+      </a:fontRef>
+    </dgm:style>
+  </dgm:styleLbl>
+  <dgm:styleLbl name="parChTrans1D1">
+    <dgm:scene3d>
+      <a:camera prst="orthographicFront"/>
+      <a:lightRig rig="threePt" dir="t"/>
+    </dgm:scene3d>
+    <dgm:sp3d/>
+    <dgm:txPr/>
+    <dgm:style>
+      <a:lnRef idx="2">
+        <a:scrgbClr r="0" g="0" b="0"/>
+      </a:lnRef>
+      <a:fillRef idx="0">
+        <a:scrgbClr r="0" g="0" b="0"/>
+      </a:fillRef>
+      <a:effectRef idx="0">
+        <a:scrgbClr r="0" g="0" b="0"/>
+      </a:effectRef>
+      <a:fontRef idx="minor"/>
+    </dgm:style>
+  </dgm:styleLbl>
+  <dgm:styleLbl name="parChTrans1D2">
+    <dgm:scene3d>
+      <a:camera prst="orthographicFront"/>
+      <a:lightRig rig="threePt" dir="t"/>
+    </dgm:scene3d>
+    <dgm:sp3d/>
+    <dgm:txPr/>
+    <dgm:style>
+      <a:lnRef idx="2">
+        <a:scrgbClr r="0" g="0" b="0"/>
+      </a:lnRef>
+      <a:fillRef idx="0">
+        <a:scrgbClr r="0" g="0" b="0"/>
+      </a:fillRef>
+      <a:effectRef idx="0">
+        <a:scrgbClr r="0" g="0" b="0"/>
+      </a:effectRef>
+      <a:fontRef idx="minor"/>
+    </dgm:style>
+  </dgm:styleLbl>
+  <dgm:styleLbl name="parChTrans1D3">
+    <dgm:scene3d>
+      <a:camera prst="orthographicFront"/>
+      <a:lightRig rig="threePt" dir="t"/>
+    </dgm:scene3d>
+    <dgm:sp3d/>
+    <dgm:txPr/>
+    <dgm:style>
+      <a:lnRef idx="2">
+        <a:scrgbClr r="0" g="0" b="0"/>
+      </a:lnRef>
+      <a:fillRef idx="0">
+        <a:scrgbClr r="0" g="0" b="0"/>
+      </a:fillRef>
+      <a:effectRef idx="0">
+        <a:scrgbClr r="0" g="0" b="0"/>
+      </a:effectRef>
+      <a:fontRef idx="minor"/>
+    </dgm:style>
+  </dgm:styleLbl>
+  <dgm:styleLbl name="parChTrans1D4">
+    <dgm:scene3d>
+      <a:camera prst="orthographicFront"/>
+      <a:lightRig rig="threePt" dir="t"/>
+    </dgm:scene3d>
+    <dgm:sp3d/>
+    <dgm:txPr/>
+    <dgm:style>
+      <a:lnRef idx="2">
+        <a:scrgbClr r="0" g="0" b="0"/>
+      </a:lnRef>
+      <a:fillRef idx="0">
+        <a:scrgbClr r="0" g="0" b="0"/>
+      </a:fillRef>
+      <a:effectRef idx="0">
+        <a:scrgbClr r="0" g="0" b="0"/>
+      </a:effectRef>
+      <a:fontRef idx="minor"/>
+    </dgm:style>
+  </dgm:styleLbl>
+  <dgm:styleLbl name="fgAcc1">
+    <dgm:scene3d>
+      <a:camera prst="orthographicFront"/>
+      <a:lightRig rig="threePt" dir="t"/>
+    </dgm:scene3d>
+    <dgm:sp3d/>
+    <dgm:txPr/>
+    <dgm:style>
+      <a:lnRef idx="2">
+        <a:scrgbClr r="0" g="0" b="0"/>
+      </a:lnRef>
+      <a:fillRef idx="1">
+        <a:scrgbClr r="0" g="0" b="0"/>
+      </a:fillRef>
+      <a:effectRef idx="0">
+        <a:scrgbClr r="0" g="0" b="0"/>
+      </a:effectRef>
+      <a:fontRef idx="minor"/>
+    </dgm:style>
+  </dgm:styleLbl>
+  <dgm:styleLbl name="conFgAcc1">
+    <dgm:scene3d>
+      <a:camera prst="orthographicFront"/>
+      <a:lightRig rig="threePt" dir="t"/>
+    </dgm:scene3d>
+    <dgm:sp3d/>
+    <dgm:txPr/>
+    <dgm:style>
+      <a:lnRef idx="2">
+        <a:scrgbClr r="0" g="0" b="0"/>
+      </a:lnRef>
+      <a:fillRef idx="1">
+        <a:scrgbClr r="0" g="0" b="0"/>
+      </a:fillRef>
+      <a:effectRef idx="0">
+        <a:scrgbClr r="0" g="0" b="0"/>
+      </a:effectRef>
+      <a:fontRef idx="minor"/>
+    </dgm:style>
+  </dgm:styleLbl>
+  <dgm:styleLbl name="alignAcc1">
+    <dgm:scene3d>
+      <a:camera prst="orthographicFront"/>
+      <a:lightRig rig="threePt" dir="t"/>
+    </dgm:scene3d>
+    <dgm:sp3d/>
+    <dgm:txPr/>
+    <dgm:style>
+      <a:lnRef idx="2">
+        <a:scrgbClr r="0" g="0" b="0"/>
+      </a:lnRef>
+      <a:fillRef idx="1">
+        <a:scrgbClr r="0" g="0" b="0"/>
+      </a:fillRef>
+      <a:effectRef idx="0">
+        <a:scrgbClr r="0" g="0" b="0"/>
+      </a:effectRef>
+      <a:fontRef idx="minor"/>
+    </dgm:style>
+  </dgm:styleLbl>
+  <dgm:styleLbl name="trAlignAcc1">
+    <dgm:scene3d>
+      <a:camera prst="orthographicFront"/>
+      <a:lightRig rig="threePt" dir="t"/>
+    </dgm:scene3d>
+    <dgm:sp3d/>
+    <dgm:txPr/>
+    <dgm:style>
+      <a:lnRef idx="1">
+        <a:scrgbClr r="0" g="0" b="0"/>
+      </a:lnRef>
+      <a:fillRef idx="1">
+        <a:scrgbClr r="0" g="0" b="0"/>
+      </a:fillRef>
+      <a:effectRef idx="0">
+        <a:scrgbClr r="0" g="0" b="0"/>
+      </a:effectRef>
+      <a:fontRef idx="minor"/>
+    </dgm:style>
+  </dgm:styleLbl>
+  <dgm:styleLbl name="bgAcc1">
+    <dgm:scene3d>
+      <a:camera prst="orthographicFront"/>
+      <a:lightRig rig="threePt" dir="t"/>
+    </dgm:scene3d>
+    <dgm:sp3d/>
+    <dgm:txPr/>
+    <dgm:style>
+      <a:lnRef idx="2">
+        <a:scrgbClr r="0" g="0" b="0"/>
+      </a:lnRef>
+      <a:fillRef idx="1">
+        <a:scrgbClr r="0" g="0" b="0"/>
+      </a:fillRef>
+      <a:effectRef idx="0">
+        <a:scrgbClr r="0" g="0" b="0"/>
+      </a:effectRef>
+      <a:fontRef idx="minor"/>
+    </dgm:style>
+  </dgm:styleLbl>
+  <dgm:styleLbl name="solidFgAcc1">
+    <dgm:scene3d>
+      <a:camera prst="orthographicFront"/>
+      <a:lightRig rig="threePt" dir="t"/>
+    </dgm:scene3d>
+    <dgm:sp3d/>
+    <dgm:txPr/>
+    <dgm:style>
+      <a:lnRef idx="2">
+        <a:scrgbClr r="0" g="0" b="0"/>
+      </a:lnRef>
+      <a:fillRef idx="1">
+        <a:scrgbClr r="0" g="0" b="0"/>
+      </a:fillRef>
+      <a:effectRef idx="0">
+        <a:scrgbClr r="0" g="0" b="0"/>
+      </a:effectRef>
+      <a:fontRef idx="minor"/>
+    </dgm:style>
+  </dgm:styleLbl>
+  <dgm:styleLbl name="solidAlignAcc1">
+    <dgm:scene3d>
+      <a:camera prst="orthographicFront"/>
+      <a:lightRig rig="threePt" dir="t"/>
+    </dgm:scene3d>
+    <dgm:sp3d/>
+    <dgm:txPr/>
+    <dgm:style>
+      <a:lnRef idx="2">
+        <a:scrgbClr r="0" g="0" b="0"/>
+      </a:lnRef>
+      <a:fillRef idx="1">
+        <a:scrgbClr r="0" g="0" b="0"/>
+      </a:fillRef>
+      <a:effectRef idx="0">
+        <a:scrgbClr r="0" g="0" b="0"/>
+      </a:effectRef>
+      <a:fontRef idx="minor"/>
+    </dgm:style>
+  </dgm:styleLbl>
+  <dgm:styleLbl name="solidBgAcc1">
+    <dgm:scene3d>
+      <a:camera prst="orthographicFront"/>
+      <a:lightRig rig="threePt" dir="t"/>
+    </dgm:scene3d>
+    <dgm:sp3d/>
+    <dgm:txPr/>
+    <dgm:style>
+      <a:lnRef idx="2">
+        <a:scrgbClr r="0" g="0" b="0"/>
+      </a:lnRef>
+      <a:fillRef idx="1">
+        <a:scrgbClr r="0" g="0" b="0"/>
+      </a:fillRef>
+      <a:effectRef idx="0">
+        <a:scrgbClr r="0" g="0" b="0"/>
+      </a:effectRef>
+      <a:fontRef idx="minor"/>
+    </dgm:style>
+  </dgm:styleLbl>
+  <dgm:styleLbl name="fgAccFollowNode1">
+    <dgm:scene3d>
+      <a:camera prst="orthographicFront"/>
+      <a:lightRig rig="threePt" dir="t"/>
+    </dgm:scene3d>
+    <dgm:sp3d/>
+    <dgm:txPr/>
+    <dgm:style>
+      <a:lnRef idx="2">
+        <a:scrgbClr r="0" g="0" b="0"/>
+      </a:lnRef>
+      <a:fillRef idx="1">
+        <a:scrgbClr r="0" g="0" b="0"/>
+      </a:fillRef>
+      <a:effectRef idx="0">
+        <a:scrgbClr r="0" g="0" b="0"/>
+      </a:effectRef>
+      <a:fontRef idx="minor"/>
+    </dgm:style>
+  </dgm:styleLbl>
+  <dgm:styleLbl name="alignAccFollowNode1">
+    <dgm:scene3d>
+      <a:camera prst="orthographicFront"/>
+      <a:lightRig rig="threePt" dir="t"/>
+    </dgm:scene3d>
+    <dgm:sp3d/>
+    <dgm:txPr/>
+    <dgm:style>
+      <a:lnRef idx="2">
+        <a:scrgbClr r="0" g="0" b="0"/>
+      </a:lnRef>
+      <a:fillRef idx="1">
+        <a:scrgbClr r="0" g="0" b="0"/>
+      </a:fillRef>
+      <a:effectRef idx="0">
+        <a:scrgbClr r="0" g="0" b="0"/>
+      </a:effectRef>
+      <a:fontRef idx="minor"/>
+    </dgm:style>
+  </dgm:styleLbl>
+  <dgm:styleLbl name="bgAccFollowNode1">
+    <dgm:scene3d>
+      <a:camera prst="orthographicFront"/>
+      <a:lightRig rig="threePt" dir="t"/>
+    </dgm:scene3d>
+    <dgm:sp3d/>
+    <dgm:txPr/>
+    <dgm:style>
+      <a:lnRef idx="2">
+        <a:scrgbClr r="0" g="0" b="0"/>
+      </a:lnRef>
+      <a:fillRef idx="1">
+        <a:scrgbClr r="0" g="0" b="0"/>
+      </a:fillRef>
+      <a:effectRef idx="0">
+        <a:scrgbClr r="0" g="0" b="0"/>
+      </a:effectRef>
+      <a:fontRef idx="minor"/>
+    </dgm:style>
+  </dgm:styleLbl>
+  <dgm:styleLbl name="fgAcc0">
+    <dgm:scene3d>
+      <a:camera prst="orthographicFront"/>
+      <a:lightRig rig="threePt" dir="t"/>
+    </dgm:scene3d>
+    <dgm:sp3d/>
+    <dgm:txPr/>
+    <dgm:style>
+      <a:lnRef idx="2">
+        <a:scrgbClr r="0" g="0" b="0"/>
+      </a:lnRef>
+      <a:fillRef idx="1">
+        <a:scrgbClr r="0" g="0" b="0"/>
+      </a:fillRef>
+      <a:effectRef idx="0">
+        <a:scrgbClr r="0" g="0" b="0"/>
+      </a:effectRef>
+      <a:fontRef idx="minor"/>
+    </dgm:style>
+  </dgm:styleLbl>
+  <dgm:styleLbl name="fgAcc2">
+    <dgm:scene3d>
+      <a:camera prst="orthographicFront"/>
+      <a:lightRig rig="threePt" dir="t"/>
+    </dgm:scene3d>
+    <dgm:sp3d/>
+    <dgm:txPr/>
+    <dgm:style>
+      <a:lnRef idx="2">
+        <a:scrgbClr r="0" g="0" b="0"/>
+      </a:lnRef>
+      <a:fillRef idx="1">
+        <a:scrgbClr r="0" g="0" b="0"/>
+      </a:fillRef>
+      <a:effectRef idx="0">
+        <a:scrgbClr r="0" g="0" b="0"/>
+      </a:effectRef>
+      <a:fontRef idx="minor"/>
+    </dgm:style>
+  </dgm:styleLbl>
+  <dgm:styleLbl name="fgAcc3">
+    <dgm:scene3d>
+      <a:camera prst="orthographicFront"/>
+      <a:lightRig rig="threePt" dir="t"/>
+    </dgm:scene3d>
+    <dgm:sp3d/>
+    <dgm:txPr/>
+    <dgm:style>
+      <a:lnRef idx="2">
+        <a:scrgbClr r="0" g="0" b="0"/>
+      </a:lnRef>
+      <a:fillRef idx="1">
+        <a:scrgbClr r="0" g="0" b="0"/>
+      </a:fillRef>
+      <a:effectRef idx="0">
+        <a:scrgbClr r="0" g="0" b="0"/>
+      </a:effectRef>
+      <a:fontRef idx="minor"/>
+    </dgm:style>
+  </dgm:styleLbl>
+  <dgm:styleLbl name="fgAcc4">
+    <dgm:scene3d>
+      <a:camera prst="orthographicFront"/>
+      <a:lightRig rig="threePt" dir="t"/>
+    </dgm:scene3d>
+    <dgm:sp3d/>
+    <dgm:txPr/>
+    <dgm:style>
+      <a:lnRef idx="2">
+        <a:scrgbClr r="0" g="0" b="0"/>
+      </a:lnRef>
+      <a:fillRef idx="1">
+        <a:scrgbClr r="0" g="0" b="0"/>
+      </a:fillRef>
+      <a:effectRef idx="0">
+        <a:scrgbClr r="0" g="0" b="0"/>
+      </a:effectRef>
+      <a:fontRef idx="minor"/>
+    </dgm:style>
+  </dgm:styleLbl>
+  <dgm:styleLbl name="bgShp">
+    <dgm:scene3d>
+      <a:camera prst="orthographicFront"/>
+      <a:lightRig rig="threePt" dir="t"/>
+    </dgm:scene3d>
+    <dgm:sp3d/>
+    <dgm:txPr/>
+    <dgm:style>
+      <a:lnRef idx="0">
+        <a:scrgbClr r="0" g="0" b="0"/>
+      </a:lnRef>
+      <a:fillRef idx="1">
+        <a:scrgbClr r="0" g="0" b="0"/>
+      </a:fillRef>
+      <a:effectRef idx="0">
+        <a:scrgbClr r="0" g="0" b="0"/>
+      </a:effectRef>
+      <a:fontRef idx="minor"/>
+    </dgm:style>
+  </dgm:styleLbl>
+  <dgm:styleLbl name="dkBgShp">
+    <dgm:scene3d>
+      <a:camera prst="orthographicFront"/>
+      <a:lightRig rig="threePt" dir="t"/>
+    </dgm:scene3d>
+    <dgm:sp3d/>
+    <dgm:txPr/>
+    <dgm:style>
+      <a:lnRef idx="0">
+        <a:scrgbClr r="0" g="0" b="0"/>
+      </a:lnRef>
+      <a:fillRef idx="1">
+        <a:scrgbClr r="0" g="0" b="0"/>
+      </a:fillRef>
+      <a:effectRef idx="0">
+        <a:scrgbClr r="0" g="0" b="0"/>
+      </a:effectRef>
+      <a:fontRef idx="minor"/>
+    </dgm:style>
+  </dgm:styleLbl>
+  <dgm:styleLbl name="trBgShp">
+    <dgm:scene3d>
+      <a:camera prst="orthographicFront"/>
+      <a:lightRig rig="threePt" dir="t"/>
+    </dgm:scene3d>
+    <dgm:sp3d/>
+    <dgm:txPr/>
+    <dgm:style>
+      <a:lnRef idx="0">
+        <a:scrgbClr r="0" g="0" b="0"/>
+      </a:lnRef>
+      <a:fillRef idx="1">
+        <a:scrgbClr r="0" g="0" b="0"/>
+      </a:fillRef>
+      <a:effectRef idx="0">
+        <a:scrgbClr r="0" g="0" b="0"/>
+      </a:effectRef>
+      <a:fontRef idx="minor"/>
+    </dgm:style>
+  </dgm:styleLbl>
+  <dgm:styleLbl name="fgShp">
+    <dgm:scene3d>
+      <a:camera prst="orthographicFront"/>
+      <a:lightRig rig="threePt" dir="t"/>
+    </dgm:scene3d>
+    <dgm:sp3d/>
+    <dgm:txPr/>
+    <dgm:style>
+      <a:lnRef idx="2">
+        <a:scrgbClr r="0" g="0" b="0"/>
+      </a:lnRef>
+      <a:fillRef idx="1">
+        <a:scrgbClr r="0" g="0" b="0"/>
+      </a:fillRef>
+      <a:effectRef idx="0">
+        <a:scrgbClr r="0" g="0" b="0"/>
+      </a:effectRef>
+      <a:fontRef idx="minor"/>
+    </dgm:style>
+  </dgm:styleLbl>
+  <dgm:styleLbl name="revTx">
+    <dgm:scene3d>
+      <a:camera prst="orthographicFront"/>
+      <a:lightRig rig="threePt" dir="t"/>
+    </dgm:scene3d>
+    <dgm:sp3d/>
+    <dgm:txPr/>
+    <dgm:style>
+      <a:lnRef idx="0">
+        <a:scrgbClr r="0" g="0" b="0"/>
+      </a:lnRef>
+      <a:fillRef idx="0">
+        <a:scrgbClr r="0" g="0" b="0"/>
+      </a:fillRef>
+      <a:effectRef idx="0">
+        <a:scrgbClr r="0" g="0" b="0"/>
+      </a:effectRef>
+      <a:fontRef idx="minor"/>
+    </dgm:style>
+  </dgm:styleLbl>
+</dgm:styleDef>
+</file>
+
 <file path=ppt/slideLayouts/slideLayout1.xml><?xml version="1.0" encoding="utf-8"?>
 <p:sldLayout xmlns:a="http://schemas.openxmlformats.org/drawingml/2006/main" xmlns:r="http://schemas.openxmlformats.org/officeDocument/2006/relationships" xmlns:p="http://schemas.openxmlformats.org/presentationml/2006/main" type="title" preserve="1">
   <p:cSld name="Title Slide">
@@ -261,7 +3780,7 @@
           <a:p>
             <a:fld id="{7E349EBC-E665-401F-8565-41EC489DE4F8}" type="datetimeFigureOut">
               <a:rPr lang="nl-NL" smtClean="0"/>
-              <a:t>14-8-2024</a:t>
+              <a:t>12-9-2024</a:t>
             </a:fld>
             <a:endParaRPr lang="nl-NL"/>
           </a:p>
@@ -461,7 +3980,7 @@
           <a:p>
             <a:fld id="{7E349EBC-E665-401F-8565-41EC489DE4F8}" type="datetimeFigureOut">
               <a:rPr lang="nl-NL" smtClean="0"/>
-              <a:t>14-8-2024</a:t>
+              <a:t>12-9-2024</a:t>
             </a:fld>
             <a:endParaRPr lang="nl-NL"/>
           </a:p>
@@ -671,7 +4190,7 @@
           <a:p>
             <a:fld id="{7E349EBC-E665-401F-8565-41EC489DE4F8}" type="datetimeFigureOut">
               <a:rPr lang="nl-NL" smtClean="0"/>
-              <a:t>14-8-2024</a:t>
+              <a:t>12-9-2024</a:t>
             </a:fld>
             <a:endParaRPr lang="nl-NL"/>
           </a:p>
@@ -871,7 +4390,7 @@
           <a:p>
             <a:fld id="{7E349EBC-E665-401F-8565-41EC489DE4F8}" type="datetimeFigureOut">
               <a:rPr lang="nl-NL" smtClean="0"/>
-              <a:t>14-8-2024</a:t>
+              <a:t>12-9-2024</a:t>
             </a:fld>
             <a:endParaRPr lang="nl-NL"/>
           </a:p>
@@ -1147,7 +4666,7 @@
           <a:p>
             <a:fld id="{7E349EBC-E665-401F-8565-41EC489DE4F8}" type="datetimeFigureOut">
               <a:rPr lang="nl-NL" smtClean="0"/>
-              <a:t>14-8-2024</a:t>
+              <a:t>12-9-2024</a:t>
             </a:fld>
             <a:endParaRPr lang="nl-NL"/>
           </a:p>
@@ -1415,7 +4934,7 @@
           <a:p>
             <a:fld id="{7E349EBC-E665-401F-8565-41EC489DE4F8}" type="datetimeFigureOut">
               <a:rPr lang="nl-NL" smtClean="0"/>
-              <a:t>14-8-2024</a:t>
+              <a:t>12-9-2024</a:t>
             </a:fld>
             <a:endParaRPr lang="nl-NL"/>
           </a:p>
@@ -1830,7 +5349,7 @@
           <a:p>
             <a:fld id="{7E349EBC-E665-401F-8565-41EC489DE4F8}" type="datetimeFigureOut">
               <a:rPr lang="nl-NL" smtClean="0"/>
-              <a:t>14-8-2024</a:t>
+              <a:t>12-9-2024</a:t>
             </a:fld>
             <a:endParaRPr lang="nl-NL"/>
           </a:p>
@@ -1972,7 +5491,7 @@
           <a:p>
             <a:fld id="{7E349EBC-E665-401F-8565-41EC489DE4F8}" type="datetimeFigureOut">
               <a:rPr lang="nl-NL" smtClean="0"/>
-              <a:t>14-8-2024</a:t>
+              <a:t>12-9-2024</a:t>
             </a:fld>
             <a:endParaRPr lang="nl-NL"/>
           </a:p>
@@ -2085,7 +5604,7 @@
           <a:p>
             <a:fld id="{7E349EBC-E665-401F-8565-41EC489DE4F8}" type="datetimeFigureOut">
               <a:rPr lang="nl-NL" smtClean="0"/>
-              <a:t>14-8-2024</a:t>
+              <a:t>12-9-2024</a:t>
             </a:fld>
             <a:endParaRPr lang="nl-NL"/>
           </a:p>
@@ -2398,7 +5917,7 @@
           <a:p>
             <a:fld id="{7E349EBC-E665-401F-8565-41EC489DE4F8}" type="datetimeFigureOut">
               <a:rPr lang="nl-NL" smtClean="0"/>
-              <a:t>14-8-2024</a:t>
+              <a:t>12-9-2024</a:t>
             </a:fld>
             <a:endParaRPr lang="nl-NL"/>
           </a:p>
@@ -2687,7 +6206,7 @@
           <a:p>
             <a:fld id="{7E349EBC-E665-401F-8565-41EC489DE4F8}" type="datetimeFigureOut">
               <a:rPr lang="nl-NL" smtClean="0"/>
-              <a:t>14-8-2024</a:t>
+              <a:t>12-9-2024</a:t>
             </a:fld>
             <a:endParaRPr lang="nl-NL"/>
           </a:p>
@@ -2930,7 +6449,7 @@
           <a:p>
             <a:fld id="{7E349EBC-E665-401F-8565-41EC489DE4F8}" type="datetimeFigureOut">
               <a:rPr lang="nl-NL" smtClean="0"/>
-              <a:t>14-8-2024</a:t>
+              <a:t>12-9-2024</a:t>
             </a:fld>
             <a:endParaRPr lang="nl-NL"/>
           </a:p>
@@ -3347,56 +6866,34 @@
           <a:chExt cx="0" cy="0"/>
         </a:xfrm>
       </p:grpSpPr>
-      <p:sp>
-        <p:nvSpPr>
-          <p:cNvPr id="2" name="Title 1">
+      <p:graphicFrame>
+        <p:nvGraphicFramePr>
+          <p:cNvPr id="4" name="Diagram 3">
             <a:extLst>
               <a:ext uri="{FF2B5EF4-FFF2-40B4-BE49-F238E27FC236}">
-                <a16:creationId xmlns:a16="http://schemas.microsoft.com/office/drawing/2014/main" id="{9B7A4E99-41B2-9A35-BED3-A855C6BD49F8}"/>
+                <a16:creationId xmlns:a16="http://schemas.microsoft.com/office/drawing/2014/main" id="{CC94CBAD-4221-75F0-CC2A-19720AA4BA86}"/>
               </a:ext>
             </a:extLst>
           </p:cNvPr>
-          <p:cNvSpPr>
-            <a:spLocks noGrp="1"/>
-          </p:cNvSpPr>
+          <p:cNvGraphicFramePr/>
           <p:nvPr>
-            <p:ph type="ctrTitle"/>
+            <p:extLst>
+              <p:ext uri="{D42A27DB-BD31-4B8C-83A1-F6EECF244321}">
+                <p14:modId xmlns:p14="http://schemas.microsoft.com/office/powerpoint/2010/main" val="2919461264"/>
+              </p:ext>
+            </p:extLst>
           </p:nvPr>
-        </p:nvSpPr>
-        <p:spPr/>
-        <p:txBody>
-          <a:bodyPr/>
-          <a:lstStyle/>
-          <a:p>
-            <a:endParaRPr lang="nl-NL"/>
-          </a:p>
-        </p:txBody>
-      </p:sp>
-      <p:sp>
-        <p:nvSpPr>
-          <p:cNvPr id="3" name="Subtitle 2">
-            <a:extLst>
-              <a:ext uri="{FF2B5EF4-FFF2-40B4-BE49-F238E27FC236}">
-                <a16:creationId xmlns:a16="http://schemas.microsoft.com/office/drawing/2014/main" id="{9F232870-C974-9549-8218-8DFEF86EB2D3}"/>
-              </a:ext>
-            </a:extLst>
-          </p:cNvPr>
-          <p:cNvSpPr>
-            <a:spLocks noGrp="1"/>
-          </p:cNvSpPr>
-          <p:nvPr>
-            <p:ph type="subTitle" idx="1"/>
-          </p:nvPr>
-        </p:nvSpPr>
-        <p:spPr/>
-        <p:txBody>
-          <a:bodyPr/>
-          <a:lstStyle/>
-          <a:p>
-            <a:endParaRPr lang="nl-NL"/>
-          </a:p>
-        </p:txBody>
-      </p:sp>
+        </p:nvGraphicFramePr>
+        <p:xfrm>
+          <a:off x="1828800" y="1"/>
+          <a:ext cx="10363200" cy="6858000"/>
+        </p:xfrm>
+        <a:graphic>
+          <a:graphicData uri="http://schemas.openxmlformats.org/drawingml/2006/diagram">
+            <dgm:relIds xmlns:dgm="http://schemas.openxmlformats.org/drawingml/2006/diagram" xmlns:r="http://schemas.openxmlformats.org/officeDocument/2006/relationships" r:dm="rId2" r:lo="rId3" r:qs="rId4" r:cs="rId5"/>
+          </a:graphicData>
+        </a:graphic>
+      </p:graphicFrame>
     </p:spTree>
     <p:extLst>
       <p:ext uri="{BB962C8B-B14F-4D97-AF65-F5344CB8AC3E}">
